--- a/media/module6/slides.pptx
+++ b/media/module6/slides.pptx
@@ -22,6 +22,20 @@
     <p:sldId id="270" r:id="rId22"/>
     <p:sldId id="271" r:id="rId23"/>
     <p:sldId id="272" r:id="rId24"/>
+    <p:sldId id="273" r:id="rId25"/>
+    <p:sldId id="274" r:id="rId26"/>
+    <p:sldId id="275" r:id="rId27"/>
+    <p:sldId id="276" r:id="rId28"/>
+    <p:sldId id="277" r:id="rId29"/>
+    <p:sldId id="278" r:id="rId30"/>
+    <p:sldId id="279" r:id="rId31"/>
+    <p:sldId id="280" r:id="rId32"/>
+    <p:sldId id="281" r:id="rId33"/>
+    <p:sldId id="282" r:id="rId34"/>
+    <p:sldId id="283" r:id="rId35"/>
+    <p:sldId id="284" r:id="rId36"/>
+    <p:sldId id="285" r:id="rId37"/>
+    <p:sldId id="286" r:id="rId38"/>
   </p:sldIdLst>
   <p:sldSz cx="12191695" cy="6858000" type="screen4x3"/>
   <p:notesSz cx="6858000" cy="9144000"/>
@@ -518,7 +532,287 @@
           <a:lstStyle/>
           <a:p>
             <a:r>
-              <a:t>From MODULE6 Topics Covered.</a:t>
+              <a:t>From docs/MODULE6.md — read guides before running demos.</a:t>
+            </a:r>
+          </a:p>
+        </p:txBody>
+      </p:sp>
+      <p:sp>
+        <p:nvSpPr>
+          <p:cNvPr id="4" name="Slide Number Placeholder 3"/>
+          <p:cNvSpPr>
+            <a:spLocks noGrp="1"/>
+          </p:cNvSpPr>
+          <p:nvPr>
+            <p:ph type="sldNum" idx="5" sz="quarter"/>
+          </p:nvPr>
+        </p:nvSpPr>
+        <p:spPr/>
+      </p:sp>
+    </p:spTree>
+  </p:cSld>
+  <p:clrMapOvr>
+    <a:masterClrMapping/>
+  </p:clrMapOvr>
+</p:notes>
+</file>
+
+<file path=ppt/notesSlides/notesSlide10.xml><?xml version="1.0" encoding="utf-8"?>
+<p:notes xmlns:a="http://schemas.openxmlformats.org/drawingml/2006/main" xmlns:p="http://schemas.openxmlformats.org/presentationml/2006/main" xmlns:r="http://schemas.openxmlformats.org/officeDocument/2006/relationships">
+  <p:cSld>
+    <p:spTree>
+      <p:nvGrpSpPr>
+        <p:cNvPr id="1" name=""/>
+        <p:cNvGrpSpPr/>
+        <p:nvPr/>
+      </p:nvGrpSpPr>
+      <p:grpSpPr>
+        <a:xfrm>
+          <a:off x="0" y="0"/>
+          <a:ext cx="0" cy="0"/>
+          <a:chOff x="0" y="0"/>
+          <a:chExt cx="0" cy="0"/>
+        </a:xfrm>
+      </p:grpSpPr>
+      <p:sp>
+        <p:nvSpPr>
+          <p:cNvPr id="2" name="Slide Image Placeholder 1"/>
+          <p:cNvSpPr>
+            <a:spLocks noGrp="1"/>
+          </p:cNvSpPr>
+          <p:nvPr>
+            <p:ph type="sldImg" idx="2"/>
+          </p:nvPr>
+        </p:nvSpPr>
+        <p:spPr/>
+      </p:sp>
+      <p:sp>
+        <p:nvSpPr>
+          <p:cNvPr id="3" name="Notes Placeholder 2"/>
+          <p:cNvSpPr>
+            <a:spLocks noGrp="1"/>
+          </p:cNvSpPr>
+          <p:nvPr>
+            <p:ph type="body" idx="3" sz="quarter"/>
+          </p:nvPr>
+        </p:nvSpPr>
+        <p:spPr/>
+        <p:txBody>
+          <a:bodyPr/>
+          <a:lstStyle/>
+          <a:p>
+            <a:r>
+              <a:t>Run from course repository root.</a:t>
+            </a:r>
+          </a:p>
+        </p:txBody>
+      </p:sp>
+      <p:sp>
+        <p:nvSpPr>
+          <p:cNvPr id="4" name="Slide Number Placeholder 3"/>
+          <p:cNvSpPr>
+            <a:spLocks noGrp="1"/>
+          </p:cNvSpPr>
+          <p:nvPr>
+            <p:ph type="sldNum" idx="5" sz="quarter"/>
+          </p:nvPr>
+        </p:nvSpPr>
+        <p:spPr/>
+      </p:sp>
+    </p:spTree>
+  </p:cSld>
+  <p:clrMapOvr>
+    <a:masterClrMapping/>
+  </p:clrMapOvr>
+</p:notes>
+</file>
+
+<file path=ppt/notesSlides/notesSlide11.xml><?xml version="1.0" encoding="utf-8"?>
+<p:notes xmlns:a="http://schemas.openxmlformats.org/drawingml/2006/main" xmlns:p="http://schemas.openxmlformats.org/presentationml/2006/main" xmlns:r="http://schemas.openxmlformats.org/officeDocument/2006/relationships">
+  <p:cSld>
+    <p:spTree>
+      <p:nvGrpSpPr>
+        <p:cNvPr id="1" name=""/>
+        <p:cNvGrpSpPr/>
+        <p:nvPr/>
+      </p:nvGrpSpPr>
+      <p:grpSpPr>
+        <a:xfrm>
+          <a:off x="0" y="0"/>
+          <a:ext cx="0" cy="0"/>
+          <a:chOff x="0" y="0"/>
+          <a:chExt cx="0" cy="0"/>
+        </a:xfrm>
+      </p:grpSpPr>
+      <p:sp>
+        <p:nvSpPr>
+          <p:cNvPr id="2" name="Slide Image Placeholder 1"/>
+          <p:cNvSpPr>
+            <a:spLocks noGrp="1"/>
+          </p:cNvSpPr>
+          <p:nvPr>
+            <p:ph type="sldImg" idx="2"/>
+          </p:nvPr>
+        </p:nvSpPr>
+        <p:spPr/>
+      </p:sp>
+      <p:sp>
+        <p:nvSpPr>
+          <p:cNvPr id="3" name="Notes Placeholder 2"/>
+          <p:cNvSpPr>
+            <a:spLocks noGrp="1"/>
+          </p:cNvSpPr>
+          <p:nvPr>
+            <p:ph type="body" idx="3" sz="quarter"/>
+          </p:nvPr>
+        </p:nvSpPr>
+        <p:spPr/>
+        <p:txBody>
+          <a:bodyPr/>
+          <a:lstStyle/>
+          <a:p>
+            <a:r>
+              <a:t>module6/examples/examples/spi_uvm/README.md</a:t>
+            </a:r>
+          </a:p>
+        </p:txBody>
+      </p:sp>
+      <p:sp>
+        <p:nvSpPr>
+          <p:cNvPr id="4" name="Slide Number Placeholder 3"/>
+          <p:cNvSpPr>
+            <a:spLocks noGrp="1"/>
+          </p:cNvSpPr>
+          <p:nvPr>
+            <p:ph type="sldNum" idx="5" sz="quarter"/>
+          </p:nvPr>
+        </p:nvSpPr>
+        <p:spPr/>
+      </p:sp>
+    </p:spTree>
+  </p:cSld>
+  <p:clrMapOvr>
+    <a:masterClrMapping/>
+  </p:clrMapOvr>
+</p:notes>
+</file>
+
+<file path=ppt/notesSlides/notesSlide12.xml><?xml version="1.0" encoding="utf-8"?>
+<p:notes xmlns:a="http://schemas.openxmlformats.org/drawingml/2006/main" xmlns:p="http://schemas.openxmlformats.org/presentationml/2006/main" xmlns:r="http://schemas.openxmlformats.org/officeDocument/2006/relationships">
+  <p:cSld>
+    <p:spTree>
+      <p:nvGrpSpPr>
+        <p:cNvPr id="1" name=""/>
+        <p:cNvGrpSpPr/>
+        <p:nvPr/>
+      </p:nvGrpSpPr>
+      <p:grpSpPr>
+        <a:xfrm>
+          <a:off x="0" y="0"/>
+          <a:ext cx="0" cy="0"/>
+          <a:chOff x="0" y="0"/>
+          <a:chExt cx="0" cy="0"/>
+        </a:xfrm>
+      </p:grpSpPr>
+      <p:sp>
+        <p:nvSpPr>
+          <p:cNvPr id="2" name="Slide Image Placeholder 1"/>
+          <p:cNvSpPr>
+            <a:spLocks noGrp="1"/>
+          </p:cNvSpPr>
+          <p:nvPr>
+            <p:ph type="sldImg" idx="2"/>
+          </p:nvPr>
+        </p:nvSpPr>
+        <p:spPr/>
+      </p:sp>
+      <p:sp>
+        <p:nvSpPr>
+          <p:cNvPr id="3" name="Notes Placeholder 2"/>
+          <p:cNvSpPr>
+            <a:spLocks noGrp="1"/>
+          </p:cNvSpPr>
+          <p:nvPr>
+            <p:ph type="body" idx="3" sz="quarter"/>
+          </p:nvPr>
+        </p:nvSpPr>
+        <p:spPr/>
+        <p:txBody>
+          <a:bodyPr/>
+          <a:lstStyle/>
+          <a:p>
+            <a:r>
+              <a:t>Hands-on: module6/examples/examples/spi_uvm/</a:t>
+            </a:r>
+          </a:p>
+        </p:txBody>
+      </p:sp>
+      <p:sp>
+        <p:nvSpPr>
+          <p:cNvPr id="4" name="Slide Number Placeholder 3"/>
+          <p:cNvSpPr>
+            <a:spLocks noGrp="1"/>
+          </p:cNvSpPr>
+          <p:nvPr>
+            <p:ph type="sldNum" idx="5" sz="quarter"/>
+          </p:nvPr>
+        </p:nvSpPr>
+        <p:spPr/>
+      </p:sp>
+    </p:spTree>
+  </p:cSld>
+  <p:clrMapOvr>
+    <a:masterClrMapping/>
+  </p:clrMapOvr>
+</p:notes>
+</file>
+
+<file path=ppt/notesSlides/notesSlide13.xml><?xml version="1.0" encoding="utf-8"?>
+<p:notes xmlns:a="http://schemas.openxmlformats.org/drawingml/2006/main" xmlns:p="http://schemas.openxmlformats.org/presentationml/2006/main" xmlns:r="http://schemas.openxmlformats.org/officeDocument/2006/relationships">
+  <p:cSld>
+    <p:spTree>
+      <p:nvGrpSpPr>
+        <p:cNvPr id="1" name=""/>
+        <p:cNvGrpSpPr/>
+        <p:nvPr/>
+      </p:nvGrpSpPr>
+      <p:grpSpPr>
+        <a:xfrm>
+          <a:off x="0" y="0"/>
+          <a:ext cx="0" cy="0"/>
+          <a:chOff x="0" y="0"/>
+          <a:chExt cx="0" cy="0"/>
+        </a:xfrm>
+      </p:grpSpPr>
+      <p:sp>
+        <p:nvSpPr>
+          <p:cNvPr id="2" name="Slide Image Placeholder 1"/>
+          <p:cNvSpPr>
+            <a:spLocks noGrp="1"/>
+          </p:cNvSpPr>
+          <p:nvPr>
+            <p:ph type="sldImg" idx="2"/>
+          </p:nvPr>
+        </p:nvSpPr>
+        <p:spPr/>
+      </p:sp>
+      <p:sp>
+        <p:nvSpPr>
+          <p:cNvPr id="3" name="Notes Placeholder 2"/>
+          <p:cNvSpPr>
+            <a:spLocks noGrp="1"/>
+          </p:cNvSpPr>
+          <p:nvPr>
+            <p:ph type="body" idx="3" sz="quarter"/>
+          </p:nvPr>
+        </p:nvSpPr>
+        <p:spPr/>
+        <p:txBody>
+          <a:bodyPr/>
+          <a:lstStyle/>
+          <a:p>
+            <a:r>
+              <a:t>From MODULE6 Learning Outcomes.</a:t>
             </a:r>
           </a:p>
         </p:txBody>
@@ -588,7 +882,7 @@
           <a:lstStyle/>
           <a:p>
             <a:r>
-              <a:t>From MODULE6 Topics Covered.</a:t>
+              <a:t>From MODULE6 Design Architecture.</a:t>
             </a:r>
           </a:p>
         </p:txBody>
@@ -658,7 +952,7 @@
           <a:lstStyle/>
           <a:p>
             <a:r>
-              <a:t>From MODULE6 Topics Covered.</a:t>
+              <a:t>From MODULE6 Design Architecture.</a:t>
             </a:r>
           </a:p>
         </p:txBody>
@@ -728,7 +1022,7 @@
           <a:lstStyle/>
           <a:p>
             <a:r>
-              <a:t>Run from course repository root.</a:t>
+              <a:t>From MODULE6 Design Architecture.</a:t>
             </a:r>
           </a:p>
         </p:txBody>
@@ -798,7 +1092,7 @@
           <a:lstStyle/>
           <a:p>
             <a:r>
-              <a:t>module6/examples/spi_uvm/README.md</a:t>
+              <a:t>From MODULE6 Verification &amp; Testing Methods.</a:t>
             </a:r>
           </a:p>
         </p:txBody>
@@ -868,7 +1162,217 @@
           <a:lstStyle/>
           <a:p>
             <a:r>
-              <a:t>Hands-on: module6/examples/spi_uvm/</a:t>
+              <a:t>From MODULE6 Verification &amp; Testing Methods.</a:t>
+            </a:r>
+          </a:p>
+        </p:txBody>
+      </p:sp>
+      <p:sp>
+        <p:nvSpPr>
+          <p:cNvPr id="4" name="Slide Number Placeholder 3"/>
+          <p:cNvSpPr>
+            <a:spLocks noGrp="1"/>
+          </p:cNvSpPr>
+          <p:nvPr>
+            <p:ph type="sldNum" idx="5" sz="quarter"/>
+          </p:nvPr>
+        </p:nvSpPr>
+        <p:spPr/>
+      </p:sp>
+    </p:spTree>
+  </p:cSld>
+  <p:clrMapOvr>
+    <a:masterClrMapping/>
+  </p:clrMapOvr>
+</p:notes>
+</file>
+
+<file path=ppt/notesSlides/notesSlide7.xml><?xml version="1.0" encoding="utf-8"?>
+<p:notes xmlns:a="http://schemas.openxmlformats.org/drawingml/2006/main" xmlns:p="http://schemas.openxmlformats.org/presentationml/2006/main" xmlns:r="http://schemas.openxmlformats.org/officeDocument/2006/relationships">
+  <p:cSld>
+    <p:spTree>
+      <p:nvGrpSpPr>
+        <p:cNvPr id="1" name=""/>
+        <p:cNvGrpSpPr/>
+        <p:nvPr/>
+      </p:nvGrpSpPr>
+      <p:grpSpPr>
+        <a:xfrm>
+          <a:off x="0" y="0"/>
+          <a:ext cx="0" cy="0"/>
+          <a:chOff x="0" y="0"/>
+          <a:chExt cx="0" cy="0"/>
+        </a:xfrm>
+      </p:grpSpPr>
+      <p:sp>
+        <p:nvSpPr>
+          <p:cNvPr id="2" name="Slide Image Placeholder 1"/>
+          <p:cNvSpPr>
+            <a:spLocks noGrp="1"/>
+          </p:cNvSpPr>
+          <p:nvPr>
+            <p:ph type="sldImg" idx="2"/>
+          </p:nvPr>
+        </p:nvSpPr>
+        <p:spPr/>
+      </p:sp>
+      <p:sp>
+        <p:nvSpPr>
+          <p:cNvPr id="3" name="Notes Placeholder 2"/>
+          <p:cNvSpPr>
+            <a:spLocks noGrp="1"/>
+          </p:cNvSpPr>
+          <p:nvPr>
+            <p:ph type="body" idx="3" sz="quarter"/>
+          </p:nvPr>
+        </p:nvSpPr>
+        <p:spPr/>
+        <p:txBody>
+          <a:bodyPr/>
+          <a:lstStyle/>
+          <a:p>
+            <a:r>
+              <a:t>From MODULE6 Verification &amp; Testing Methods.</a:t>
+            </a:r>
+          </a:p>
+        </p:txBody>
+      </p:sp>
+      <p:sp>
+        <p:nvSpPr>
+          <p:cNvPr id="4" name="Slide Number Placeholder 3"/>
+          <p:cNvSpPr>
+            <a:spLocks noGrp="1"/>
+          </p:cNvSpPr>
+          <p:nvPr>
+            <p:ph type="sldNum" idx="5" sz="quarter"/>
+          </p:nvPr>
+        </p:nvSpPr>
+        <p:spPr/>
+      </p:sp>
+    </p:spTree>
+  </p:cSld>
+  <p:clrMapOvr>
+    <a:masterClrMapping/>
+  </p:clrMapOvr>
+</p:notes>
+</file>
+
+<file path=ppt/notesSlides/notesSlide8.xml><?xml version="1.0" encoding="utf-8"?>
+<p:notes xmlns:a="http://schemas.openxmlformats.org/drawingml/2006/main" xmlns:p="http://schemas.openxmlformats.org/presentationml/2006/main" xmlns:r="http://schemas.openxmlformats.org/officeDocument/2006/relationships">
+  <p:cSld>
+    <p:spTree>
+      <p:nvGrpSpPr>
+        <p:cNvPr id="1" name=""/>
+        <p:cNvGrpSpPr/>
+        <p:nvPr/>
+      </p:nvGrpSpPr>
+      <p:grpSpPr>
+        <a:xfrm>
+          <a:off x="0" y="0"/>
+          <a:ext cx="0" cy="0"/>
+          <a:chOff x="0" y="0"/>
+          <a:chExt cx="0" cy="0"/>
+        </a:xfrm>
+      </p:grpSpPr>
+      <p:sp>
+        <p:nvSpPr>
+          <p:cNvPr id="2" name="Slide Image Placeholder 1"/>
+          <p:cNvSpPr>
+            <a:spLocks noGrp="1"/>
+          </p:cNvSpPr>
+          <p:nvPr>
+            <p:ph type="sldImg" idx="2"/>
+          </p:nvPr>
+        </p:nvSpPr>
+        <p:spPr/>
+      </p:sp>
+      <p:sp>
+        <p:nvSpPr>
+          <p:cNvPr id="3" name="Notes Placeholder 2"/>
+          <p:cNvSpPr>
+            <a:spLocks noGrp="1"/>
+          </p:cNvSpPr>
+          <p:nvPr>
+            <p:ph type="body" idx="3" sz="quarter"/>
+          </p:nvPr>
+        </p:nvSpPr>
+        <p:spPr/>
+        <p:txBody>
+          <a:bodyPr/>
+          <a:lstStyle/>
+          <a:p>
+            <a:r>
+              <a:t>From MODULE6 Topics Covered.</a:t>
+            </a:r>
+          </a:p>
+        </p:txBody>
+      </p:sp>
+      <p:sp>
+        <p:nvSpPr>
+          <p:cNvPr id="4" name="Slide Number Placeholder 3"/>
+          <p:cNvSpPr>
+            <a:spLocks noGrp="1"/>
+          </p:cNvSpPr>
+          <p:nvPr>
+            <p:ph type="sldNum" idx="5" sz="quarter"/>
+          </p:nvPr>
+        </p:nvSpPr>
+        <p:spPr/>
+      </p:sp>
+    </p:spTree>
+  </p:cSld>
+  <p:clrMapOvr>
+    <a:masterClrMapping/>
+  </p:clrMapOvr>
+</p:notes>
+</file>
+
+<file path=ppt/notesSlides/notesSlide9.xml><?xml version="1.0" encoding="utf-8"?>
+<p:notes xmlns:a="http://schemas.openxmlformats.org/drawingml/2006/main" xmlns:p="http://schemas.openxmlformats.org/presentationml/2006/main" xmlns:r="http://schemas.openxmlformats.org/officeDocument/2006/relationships">
+  <p:cSld>
+    <p:spTree>
+      <p:nvGrpSpPr>
+        <p:cNvPr id="1" name=""/>
+        <p:cNvGrpSpPr/>
+        <p:nvPr/>
+      </p:nvGrpSpPr>
+      <p:grpSpPr>
+        <a:xfrm>
+          <a:off x="0" y="0"/>
+          <a:ext cx="0" cy="0"/>
+          <a:chOff x="0" y="0"/>
+          <a:chExt cx="0" cy="0"/>
+        </a:xfrm>
+      </p:grpSpPr>
+      <p:sp>
+        <p:nvSpPr>
+          <p:cNvPr id="2" name="Slide Image Placeholder 1"/>
+          <p:cNvSpPr>
+            <a:spLocks noGrp="1"/>
+          </p:cNvSpPr>
+          <p:nvPr>
+            <p:ph type="sldImg" idx="2"/>
+          </p:nvPr>
+        </p:nvSpPr>
+        <p:spPr/>
+      </p:sp>
+      <p:sp>
+        <p:nvSpPr>
+          <p:cNvPr id="3" name="Notes Placeholder 2"/>
+          <p:cNvSpPr>
+            <a:spLocks noGrp="1"/>
+          </p:cNvSpPr>
+          <p:nvPr>
+            <p:ph type="body" idx="3" sz="quarter"/>
+          </p:nvPr>
+        </p:nvSpPr>
+        <p:spPr/>
+        <p:txBody>
+          <a:bodyPr/>
+          <a:lstStyle/>
+          <a:p>
+            <a:r>
+              <a:t>From MODULE6 Topics Covered.</a:t>
             </a:r>
           </a:p>
         </p:txBody>
@@ -4000,8 +4504,8 @@
         </p:nvSpPr>
         <p:spPr>
           <a:xfrm>
-            <a:off x="548640" y="2743200"/>
-            <a:ext cx="11064240" cy="1371600"/>
+            <a:off x="548640" y="411480"/>
+            <a:ext cx="11064240" cy="777240"/>
           </a:xfrm>
           <a:prstGeom prst="rect">
             <a:avLst/>
@@ -4014,11 +4518,11 @@
           </a:bodyPr>
           <a:lstStyle/>
           <a:p>
-            <a:pPr algn="ctr">
-              <a:lnSpc>
-                <a:spcPts val="2200"/>
-              </a:lnSpc>
-              <a:defRPr sz="3600" b="1">
+            <a:pPr>
+              <a:lnSpc>
+                <a:spcPts val="2200"/>
+              </a:lnSpc>
+              <a:defRPr sz="2800" b="1">
                 <a:solidFill>
                   <a:srgbClr val="1A1A2E"/>
                 </a:solidFill>
@@ -4026,14 +4530,77 @@
               </a:defRPr>
             </a:pPr>
             <a:r>
-              <a:t>Hands-on examples</a:t>
-            </a:r>
-          </a:p>
-        </p:txBody>
-      </p:sp>
-      <p:sp>
-        <p:nvSpPr>
-          <p:cNvPr id="3" name="TextBox 2"/>
+              <a:t>Verification environment architecture</a:t>
+            </a:r>
+          </a:p>
+        </p:txBody>
+      </p:sp>
+      <p:pic>
+        <p:nvPicPr>
+          <p:cNvPr id="3" name="Picture 2" descr="verification_architecture.png"/>
+          <p:cNvPicPr>
+            <a:picLocks noChangeAspect="1"/>
+          </p:cNvPicPr>
+          <p:nvPr/>
+        </p:nvPicPr>
+        <p:blipFill>
+          <a:blip r:embed="rId2"/>
+          <a:stretch>
+            <a:fillRect/>
+          </a:stretch>
+        </p:blipFill>
+        <p:spPr>
+          <a:xfrm>
+            <a:off x="548640" y="1143000"/>
+            <a:ext cx="8128000" cy="4572000"/>
+          </a:xfrm>
+          <a:prstGeom prst="rect">
+            <a:avLst/>
+          </a:prstGeom>
+        </p:spPr>
+      </p:pic>
+      <p:sp>
+        <p:nvSpPr>
+          <p:cNvPr id="4" name="TextBox 3"/>
+          <p:cNvSpPr txBox="1"/>
+          <p:nvPr/>
+        </p:nvSpPr>
+        <p:spPr>
+          <a:xfrm>
+            <a:off x="548640" y="5897880"/>
+            <a:ext cx="11064240" cy="411480"/>
+          </a:xfrm>
+          <a:prstGeom prst="rect">
+            <a:avLst/>
+          </a:prstGeom>
+          <a:noFill/>
+        </p:spPr>
+        <p:txBody>
+          <a:bodyPr wrap="square">
+            <a:noAutofit/>
+          </a:bodyPr>
+          <a:lstStyle/>
+          <a:p>
+            <a:pPr>
+              <a:lnSpc>
+                <a:spcPts val="2200"/>
+              </a:lnSpc>
+              <a:defRPr sz="1200" b="0">
+                <a:solidFill>
+                  <a:srgbClr val="333333"/>
+                </a:solidFill>
+                <a:latin typeface="Calibri"/>
+              </a:defRPr>
+            </a:pPr>
+            <a:r>
+              <a:t>Module 6: UVM layers, agents, and checkers for this phase.</a:t>
+            </a:r>
+          </a:p>
+        </p:txBody>
+      </p:sp>
+      <p:sp>
+        <p:nvSpPr>
+          <p:cNvPr id="5" name="TextBox 4"/>
           <p:cNvSpPr txBox="1"/>
           <p:nvPr/>
         </p:nvSpPr>
@@ -4122,7 +4689,7 @@
               </a:defRPr>
             </a:pPr>
             <a:r>
-              <a:t>Module 6 self-check</a:t>
+              <a:t>1. SPI DUT (reused from Module 5)</a:t>
             </a:r>
           </a:p>
         </p:txBody>
@@ -4135,15 +4702,13 @@
         </p:nvSpPr>
         <p:spPr>
           <a:xfrm>
-            <a:off x="548640" y="1051560"/>
-            <a:ext cx="11064240" cy="914400"/>
-          </a:xfrm>
-          <a:prstGeom prst="rect">
-            <a:avLst/>
-          </a:prstGeom>
-          <a:solidFill>
-            <a:srgbClr val="F4F4F4"/>
-          </a:solidFill>
+            <a:off x="548640" y="1234440"/>
+            <a:ext cx="11064240" cy="4937760"/>
+          </a:xfrm>
+          <a:prstGeom prst="rect">
+            <a:avLst/>
+          </a:prstGeom>
+          <a:noFill/>
         </p:spPr>
         <p:txBody>
           <a:bodyPr wrap="square">
@@ -4156,48 +4721,62 @@
                 <a:spcPts val="2200"/>
               </a:lnSpc>
               <a:spcAft>
-                <a:spcPts val="200"/>
+                <a:spcPts val="1000"/>
               </a:spcAft>
               <a:defRPr sz="2000" b="0">
                 <a:solidFill>
                   <a:srgbClr val="333333"/>
                 </a:solidFill>
-                <a:latin typeface="Consolas"/>
-              </a:defRPr>
-            </a:pPr>
-            <a:r>
-              <a:t>$ ./scripts/module6.sh --check</a:t>
-            </a:r>
-          </a:p>
-        </p:txBody>
-      </p:sp>
-      <p:pic>
-        <p:nvPicPr>
-          <p:cNvPr id="4" name="Picture 3" descr="module6_check.png"/>
-          <p:cNvPicPr>
-            <a:picLocks noChangeAspect="1"/>
-          </p:cNvPicPr>
-          <p:nvPr/>
-        </p:nvPicPr>
-        <p:blipFill>
-          <a:blip r:embed="rId2"/>
-          <a:stretch>
-            <a:fillRect/>
-          </a:stretch>
-        </p:blipFill>
-        <p:spPr>
-          <a:xfrm>
-            <a:off x="548640" y="1965960"/>
-            <a:ext cx="7071358" cy="3977639"/>
-          </a:xfrm>
-          <a:prstGeom prst="rect">
-            <a:avLst/>
-          </a:prstGeom>
-        </p:spPr>
-      </p:pic>
-      <p:sp>
-        <p:nvSpPr>
-          <p:cNvPr id="5" name="TextBox 4"/>
+                <a:latin typeface="Calibri"/>
+              </a:defRPr>
+            </a:pPr>
+            <a:r>
+              <a:t>• spi_master + clk_div in</a:t>
+            </a:r>
+          </a:p>
+          <a:p>
+            <a:pPr>
+              <a:lnSpc>
+                <a:spcPts val="2200"/>
+              </a:lnSpc>
+              <a:spcAft>
+                <a:spcPts val="1000"/>
+              </a:spcAft>
+              <a:defRPr sz="2000" b="0">
+                <a:solidFill>
+                  <a:srgbClr val="333333"/>
+                </a:solidFill>
+                <a:latin typeface="Calibri"/>
+              </a:defRPr>
+            </a:pPr>
+            <a:r>
+              <a:t>      `module6/examples/spi_uvm/dut/`.</a:t>
+            </a:r>
+          </a:p>
+          <a:p>
+            <a:pPr>
+              <a:lnSpc>
+                <a:spcPts val="2200"/>
+              </a:lnSpc>
+              <a:spcAft>
+                <a:spcPts val="1000"/>
+              </a:spcAft>
+              <a:defRPr sz="2000" b="0">
+                <a:solidFill>
+                  <a:srgbClr val="333333"/>
+                </a:solidFill>
+                <a:latin typeface="Calibri"/>
+              </a:defRPr>
+            </a:pPr>
+            <a:r>
+              <a:t>• spi_master_if connects UVM to DUT pins.</a:t>
+            </a:r>
+          </a:p>
+        </p:txBody>
+      </p:sp>
+      <p:sp>
+        <p:nvSpPr>
+          <p:cNvPr id="4" name="TextBox 3"/>
           <p:cNvSpPr txBox="1"/>
           <p:nvPr/>
         </p:nvSpPr>
@@ -4286,7 +4865,7 @@
               </a:defRPr>
             </a:pPr>
             <a:r>
-              <a:t>Example 1: SPI UVM</a:t>
+              <a:t>2. UVM agent structure</a:t>
             </a:r>
           </a:p>
         </p:txBody>
@@ -4328,7 +4907,7 @@
               </a:defRPr>
             </a:pPr>
             <a:r>
-              <a:t>• UVM phases and reporting (DRIVER, MONITOR,</a:t>
+              <a:t>• SpiTransaction = one byte; SpiSequence = directed</a:t>
             </a:r>
           </a:p>
           <a:p>
@@ -4347,7 +4926,7 @@
               </a:defRPr>
             </a:pPr>
             <a:r>
-              <a:t>      SCOREBOARD).</a:t>
+              <a:t>      list; SpiDriver waits on `done`.</a:t>
             </a:r>
           </a:p>
           <a:p>
@@ -4366,7 +4945,7 @@
               </a:defRPr>
             </a:pPr>
             <a:r>
-              <a:t>• Scoreboard checks (expected byte from sequence vs</a:t>
+              <a:t>• SpiMonitor samples MOSI on rising SCLK while `cs_n`</a:t>
             </a:r>
           </a:p>
           <a:p>
@@ -4385,7 +4964,7 @@
               </a:defRPr>
             </a:pPr>
             <a:r>
-              <a:t>      observed byte on MOSI).</a:t>
+              <a:t>      is low (Mode 0, MSB first).</a:t>
             </a:r>
           </a:p>
           <a:p>
@@ -4404,7 +4983,7 @@
               </a:defRPr>
             </a:pPr>
             <a:r>
-              <a:t>• Final scoreboard summary (matches and mismatches).</a:t>
+              <a:t>• SpiScoreboard compares expected vs `observed_mosi`.</a:t>
             </a:r>
           </a:p>
         </p:txBody>
@@ -4500,7 +5079,7 @@
               </a:defRPr>
             </a:pPr>
             <a:r>
-              <a:t>Demo: SPI UVM</a:t>
+              <a:t>3. Bus vs DUT checking</a:t>
             </a:r>
           </a:p>
         </p:txBody>
@@ -4513,15 +5092,13 @@
         </p:nvSpPr>
         <p:spPr>
           <a:xfrm>
-            <a:off x="548640" y="1051560"/>
-            <a:ext cx="11064240" cy="914400"/>
-          </a:xfrm>
-          <a:prstGeom prst="rect">
-            <a:avLst/>
-          </a:prstGeom>
-          <a:solidFill>
-            <a:srgbClr val="F4F4F4"/>
-          </a:solidFill>
+            <a:off x="548640" y="1234440"/>
+            <a:ext cx="11064240" cy="4937760"/>
+          </a:xfrm>
+          <a:prstGeom prst="rect">
+            <a:avLst/>
+          </a:prstGeom>
+          <a:noFill/>
         </p:spPr>
         <p:txBody>
           <a:bodyPr wrap="square">
@@ -4534,48 +5111,43 @@
                 <a:spcPts val="2200"/>
               </a:lnSpc>
               <a:spcAft>
-                <a:spcPts val="200"/>
+                <a:spcPts val="1000"/>
               </a:spcAft>
               <a:defRPr sz="2000" b="0">
                 <a:solidFill>
                   <a:srgbClr val="333333"/>
                 </a:solidFill>
-                <a:latin typeface="Consolas"/>
-              </a:defRPr>
-            </a:pPr>
-            <a:r>
-              <a:t>$ ./scripts/module6.sh --run</a:t>
-            </a:r>
-          </a:p>
-        </p:txBody>
-      </p:sp>
-      <p:pic>
-        <p:nvPicPr>
-          <p:cNvPr id="4" name="Picture 3" descr="ex01_spi_uvm.png"/>
-          <p:cNvPicPr>
-            <a:picLocks noChangeAspect="1"/>
-          </p:cNvPicPr>
-          <p:nvPr/>
-        </p:nvPicPr>
-        <p:blipFill>
-          <a:blip r:embed="rId2"/>
-          <a:stretch>
-            <a:fillRect/>
-          </a:stretch>
-        </p:blipFill>
-        <p:spPr>
-          <a:xfrm>
-            <a:off x="548640" y="1965960"/>
-            <a:ext cx="7071358" cy="3977639"/>
-          </a:xfrm>
-          <a:prstGeom prst="rect">
-            <a:avLst/>
-          </a:prstGeom>
-        </p:spPr>
-      </p:pic>
-      <p:sp>
-        <p:nvSpPr>
-          <p:cNvPr id="5" name="TextBox 4"/>
+                <a:latin typeface="Calibri"/>
+              </a:defRPr>
+            </a:pPr>
+            <a:r>
+              <a:t>• Monitor validates wire behavior; `done` alone is not</a:t>
+            </a:r>
+          </a:p>
+          <a:p>
+            <a:pPr>
+              <a:lnSpc>
+                <a:spcPts val="2200"/>
+              </a:lnSpc>
+              <a:spcAft>
+                <a:spcPts val="1000"/>
+              </a:spcAft>
+              <a:defRPr sz="2000" b="0">
+                <a:solidFill>
+                  <a:srgbClr val="333333"/>
+                </a:solidFill>
+                <a:latin typeface="Calibri"/>
+              </a:defRPr>
+            </a:pPr>
+            <a:r>
+              <a:t>      sufficient for sign-off.</a:t>
+            </a:r>
+          </a:p>
+        </p:txBody>
+      </p:sp>
+      <p:sp>
+        <p:nvSpPr>
+          <p:cNvPr id="4" name="TextBox 3"/>
           <p:cNvSpPr txBox="1"/>
           <p:nvPr/>
         </p:nvSpPr>
@@ -4664,7 +5236,7 @@
               </a:defRPr>
             </a:pPr>
             <a:r>
-              <a:t>Practice &amp; assessment</a:t>
+              <a:t>Verification &amp; testing methods</a:t>
             </a:r>
           </a:p>
         </p:txBody>
@@ -4760,21 +5332,45 @@
               </a:defRPr>
             </a:pPr>
             <a:r>
-              <a:t>Exercises</a:t>
-            </a:r>
-          </a:p>
-        </p:txBody>
-      </p:sp>
-      <p:sp>
-        <p:nvSpPr>
-          <p:cNvPr id="3" name="TextBox 2"/>
+              <a:t>Testing and closure flow</a:t>
+            </a:r>
+          </a:p>
+        </p:txBody>
+      </p:sp>
+      <p:pic>
+        <p:nvPicPr>
+          <p:cNvPr id="3" name="Picture 2" descr="testing_methods.png"/>
+          <p:cNvPicPr>
+            <a:picLocks noChangeAspect="1"/>
+          </p:cNvPicPr>
+          <p:nvPr/>
+        </p:nvPicPr>
+        <p:blipFill>
+          <a:blip r:embed="rId2"/>
+          <a:stretch>
+            <a:fillRect/>
+          </a:stretch>
+        </p:blipFill>
+        <p:spPr>
+          <a:xfrm>
+            <a:off x="548640" y="1143000"/>
+            <a:ext cx="8128000" cy="4572000"/>
+          </a:xfrm>
+          <a:prstGeom prst="rect">
+            <a:avLst/>
+          </a:prstGeom>
+        </p:spPr>
+      </p:pic>
+      <p:sp>
+        <p:nvSpPr>
+          <p:cNvPr id="4" name="TextBox 3"/>
           <p:cNvSpPr txBox="1"/>
           <p:nvPr/>
         </p:nvSpPr>
         <p:spPr>
           <a:xfrm>
-            <a:off x="548640" y="1234440"/>
-            <a:ext cx="11064240" cy="4937760"/>
+            <a:off x="548640" y="5897880"/>
+            <a:ext cx="11064240" cy="411480"/>
           </a:xfrm>
           <a:prstGeom prst="rect">
             <a:avLst/>
@@ -4791,10 +5387,7 @@
               <a:lnSpc>
                 <a:spcPts val="2200"/>
               </a:lnSpc>
-              <a:spcAft>
-                <a:spcPts val="1000"/>
-              </a:spcAft>
-              <a:defRPr sz="2000" b="0">
+              <a:defRPr sz="1200" b="0">
                 <a:solidFill>
                   <a:srgbClr val="333333"/>
                 </a:solidFill>
@@ -4802,71 +5395,14 @@
               </a:defRPr>
             </a:pPr>
             <a:r>
-              <a:t>• Run spi_uvm</a:t>
-            </a:r>
-          </a:p>
-          <a:p>
-            <a:pPr>
-              <a:lnSpc>
-                <a:spcPts val="2200"/>
-              </a:lnSpc>
-              <a:spcAft>
-                <a:spcPts val="1000"/>
-              </a:spcAft>
-              <a:defRPr sz="2000" b="0">
-                <a:solidFill>
-                  <a:srgbClr val="333333"/>
-                </a:solidFill>
-                <a:latin typeface="Calibri"/>
-              </a:defRPr>
-            </a:pPr>
-            <a:r>
-              <a:t>• Trace one transaction</a:t>
-            </a:r>
-          </a:p>
-          <a:p>
-            <a:pPr>
-              <a:lnSpc>
-                <a:spcPts val="2200"/>
-              </a:lnSpc>
-              <a:spcAft>
-                <a:spcPts val="1000"/>
-              </a:spcAft>
-              <a:defRPr sz="2000" b="0">
-                <a:solidFill>
-                  <a:srgbClr val="333333"/>
-                </a:solidFill>
-                <a:latin typeface="Calibri"/>
-              </a:defRPr>
-            </a:pPr>
-            <a:r>
-              <a:t>• Change the sequence</a:t>
-            </a:r>
-          </a:p>
-          <a:p>
-            <a:pPr>
-              <a:lnSpc>
-                <a:spcPts val="2200"/>
-              </a:lnSpc>
-              <a:spcAft>
-                <a:spcPts val="1000"/>
-              </a:spcAft>
-              <a:defRPr sz="2000" b="0">
-                <a:solidFill>
-                  <a:srgbClr val="333333"/>
-                </a:solidFill>
-                <a:latin typeface="Calibri"/>
-              </a:defRPr>
-            </a:pPr>
-            <a:r>
-              <a:t>• Optional: Compare to UART UVM</a:t>
-            </a:r>
-          </a:p>
-        </p:txBody>
-      </p:sp>
-      <p:sp>
-        <p:nvSpPr>
-          <p:cNvPr id="4" name="TextBox 3"/>
+              <a:t>Module 6: how tests, checks, and metrics close verification goals.</a:t>
+            </a:r>
+          </a:p>
+        </p:txBody>
+      </p:sp>
+      <p:sp>
+        <p:nvSpPr>
+          <p:cNvPr id="5" name="TextBox 4"/>
           <p:cNvSpPr txBox="1"/>
           <p:nvPr/>
         </p:nvSpPr>
@@ -4955,7 +5491,7 @@
               </a:defRPr>
             </a:pPr>
             <a:r>
-              <a:t>Assessment checklist</a:t>
+              <a:t>1. Mode 0 in the testbench</a:t>
             </a:r>
           </a:p>
         </p:txBody>
@@ -4997,7 +5533,7 @@
               </a:defRPr>
             </a:pPr>
             <a:r>
-              <a:t>• Can describe the SPI UVM agent and how it maps to</a:t>
+              <a:t>• Monitor must use rising-edge capture and falling-</a:t>
             </a:r>
           </a:p>
           <a:p>
@@ -5016,64 +5552,7 @@
               </a:defRPr>
             </a:pPr>
             <a:r>
-              <a:t>      SPI (one byte, mode 0 monitoring).</a:t>
-            </a:r>
-          </a:p>
-          <a:p>
-            <a:pPr>
-              <a:lnSpc>
-                <a:spcPts val="2200"/>
-              </a:lnSpc>
-              <a:spcAft>
-                <a:spcPts val="1000"/>
-              </a:spcAft>
-              <a:defRPr sz="2000" b="0">
-                <a:solidFill>
-                  <a:srgbClr val="333333"/>
-                </a:solidFill>
-                <a:latin typeface="Calibri"/>
-              </a:defRPr>
-            </a:pPr>
-            <a:r>
-              <a:t>• Can run spi_uvm and interpret UVM output.</a:t>
-            </a:r>
-          </a:p>
-          <a:p>
-            <a:pPr>
-              <a:lnSpc>
-                <a:spcPts val="2200"/>
-              </a:lnSpc>
-              <a:spcAft>
-                <a:spcPts val="1000"/>
-              </a:spcAft>
-              <a:defRPr sz="2000" b="0">
-                <a:solidFill>
-                  <a:srgbClr val="333333"/>
-                </a:solidFill>
-                <a:latin typeface="Calibri"/>
-              </a:defRPr>
-            </a:pPr>
-            <a:r>
-              <a:t>• Ready for Module 7: I²C protocol + RTL + basic</a:t>
-            </a:r>
-          </a:p>
-          <a:p>
-            <a:pPr>
-              <a:lnSpc>
-                <a:spcPts val="2200"/>
-              </a:lnSpc>
-              <a:spcAft>
-                <a:spcPts val="1000"/>
-              </a:spcAft>
-              <a:defRPr sz="2000" b="0">
-                <a:solidFill>
-                  <a:srgbClr val="333333"/>
-                </a:solidFill>
-                <a:latin typeface="Calibri"/>
-              </a:defRPr>
-            </a:pPr>
-            <a:r>
-              <a:t>      testbench.</a:t>
+              <a:t>      edge change — matches CPOL/CPHA=0.</a:t>
             </a:r>
           </a:p>
         </p:txBody>
@@ -5169,7 +5648,7 @@
               </a:defRPr>
             </a:pPr>
             <a:r>
-              <a:t>Summary &amp; next steps</a:t>
+              <a:t>2. Directed regression</a:t>
             </a:r>
           </a:p>
         </p:txBody>
@@ -5211,7 +5690,7 @@
               </a:defRPr>
             </a:pPr>
             <a:r>
-              <a:t>• Extend SPI verification to **UVM+SV** — SPI agent</a:t>
+              <a:t>• Same byte pattern as UART UVM (0x00 … 0xFF) for</a:t>
             </a:r>
           </a:p>
           <a:p>
@@ -5230,9 +5709,128 @@
               </a:defRPr>
             </a:pPr>
             <a:r>
-              <a:t>      (transaction, sequence, driver, monitor, scoreboa…</a:t>
-            </a:r>
-          </a:p>
+              <a:t>      apples-to-apples learning.</a:t>
+            </a:r>
+          </a:p>
+        </p:txBody>
+      </p:sp>
+      <p:sp>
+        <p:nvSpPr>
+          <p:cNvPr id="4" name="TextBox 3"/>
+          <p:cNvSpPr txBox="1"/>
+          <p:nvPr/>
+        </p:nvSpPr>
+        <p:spPr>
+          <a:xfrm>
+            <a:off x="548640" y="6355080"/>
+            <a:ext cx="11064240" cy="320040"/>
+          </a:xfrm>
+          <a:prstGeom prst="rect">
+            <a:avLst/>
+          </a:prstGeom>
+          <a:noFill/>
+        </p:spPr>
+        <p:txBody>
+          <a:bodyPr wrap="square">
+            <a:noAutofit/>
+          </a:bodyPr>
+          <a:lstStyle/>
+          <a:p>
+            <a:pPr algn="r">
+              <a:lnSpc>
+                <a:spcPts val="2200"/>
+              </a:lnSpc>
+              <a:defRPr sz="1000" b="0">
+                <a:solidFill>
+                  <a:srgbClr val="666666"/>
+                </a:solidFill>
+                <a:latin typeface="Calibri"/>
+              </a:defRPr>
+            </a:pPr>
+            <a:r>
+              <a:t>learn_uart_spi_i2c / Module 6</a:t>
+            </a:r>
+          </a:p>
+        </p:txBody>
+      </p:sp>
+    </p:spTree>
+  </p:cSld>
+  <p:clrMapOvr>
+    <a:masterClrMapping/>
+  </p:clrMapOvr>
+</p:sld>
+</file>
+
+<file path=ppt/slides/slide18.xml><?xml version="1.0" encoding="utf-8"?>
+<p:sld xmlns:a="http://schemas.openxmlformats.org/drawingml/2006/main" xmlns:p="http://schemas.openxmlformats.org/presentationml/2006/main" xmlns:r="http://schemas.openxmlformats.org/officeDocument/2006/relationships">
+  <p:cSld>
+    <p:spTree>
+      <p:nvGrpSpPr>
+        <p:cNvPr id="1" name=""/>
+        <p:cNvGrpSpPr/>
+        <p:nvPr/>
+      </p:nvGrpSpPr>
+      <p:grpSpPr/>
+      <p:sp>
+        <p:nvSpPr>
+          <p:cNvPr id="2" name="TextBox 1"/>
+          <p:cNvSpPr txBox="1"/>
+          <p:nvPr/>
+        </p:nvSpPr>
+        <p:spPr>
+          <a:xfrm>
+            <a:off x="548640" y="411480"/>
+            <a:ext cx="11064240" cy="777240"/>
+          </a:xfrm>
+          <a:prstGeom prst="rect">
+            <a:avLst/>
+          </a:prstGeom>
+          <a:noFill/>
+        </p:spPr>
+        <p:txBody>
+          <a:bodyPr wrap="square">
+            <a:noAutofit/>
+          </a:bodyPr>
+          <a:lstStyle/>
+          <a:p>
+            <a:pPr>
+              <a:lnSpc>
+                <a:spcPts val="2200"/>
+              </a:lnSpc>
+              <a:defRPr sz="2800" b="1">
+                <a:solidFill>
+                  <a:srgbClr val="1A1A2E"/>
+                </a:solidFill>
+                <a:latin typeface="Calibri"/>
+              </a:defRPr>
+            </a:pPr>
+            <a:r>
+              <a:t>3. Extensions</a:t>
+            </a:r>
+          </a:p>
+        </p:txBody>
+      </p:sp>
+      <p:sp>
+        <p:nvSpPr>
+          <p:cNvPr id="3" name="TextBox 2"/>
+          <p:cNvSpPr txBox="1"/>
+          <p:nvPr/>
+        </p:nvSpPr>
+        <p:spPr>
+          <a:xfrm>
+            <a:off x="548640" y="1234440"/>
+            <a:ext cx="11064240" cy="4937760"/>
+          </a:xfrm>
+          <a:prstGeom prst="rect">
+            <a:avLst/>
+          </a:prstGeom>
+          <a:noFill/>
+        </p:spPr>
+        <p:txBody>
+          <a:bodyPr wrap="square">
+            <a:noAutofit/>
+          </a:bodyPr>
+          <a:lstStyle/>
           <a:p>
             <a:pPr>
               <a:lnSpc>
@@ -5249,7 +5847,7 @@
               </a:defRPr>
             </a:pPr>
             <a:r>
-              <a:t>• Complete module6/CHECKLIST.md</a:t>
+              <a:t>• MISO reads, random data, mode parameters — see</a:t>
             </a:r>
           </a:p>
           <a:p>
@@ -5268,7 +5866,7 @@
               </a:defRPr>
             </a:pPr>
             <a:r>
-              <a:t>• Run ./scripts/module6.sh --check</a:t>
+              <a:t>      [LEARNING_GUIDE §</a:t>
             </a:r>
           </a:p>
           <a:p>
@@ -5287,7 +5885,7 @@
               </a:defRPr>
             </a:pPr>
             <a:r>
-              <a:t>• Next: I²C</a:t>
+              <a:t>      7](LEARNING_GUIDE_PROTOCOLS_AND_UV…</a:t>
             </a:r>
           </a:p>
         </p:txBody>
@@ -5295,6 +5893,102 @@
       <p:sp>
         <p:nvSpPr>
           <p:cNvPr id="4" name="TextBox 3"/>
+          <p:cNvSpPr txBox="1"/>
+          <p:nvPr/>
+        </p:nvSpPr>
+        <p:spPr>
+          <a:xfrm>
+            <a:off x="548640" y="6355080"/>
+            <a:ext cx="11064240" cy="320040"/>
+          </a:xfrm>
+          <a:prstGeom prst="rect">
+            <a:avLst/>
+          </a:prstGeom>
+          <a:noFill/>
+        </p:spPr>
+        <p:txBody>
+          <a:bodyPr wrap="square">
+            <a:noAutofit/>
+          </a:bodyPr>
+          <a:lstStyle/>
+          <a:p>
+            <a:pPr algn="r">
+              <a:lnSpc>
+                <a:spcPts val="2200"/>
+              </a:lnSpc>
+              <a:defRPr sz="1000" b="0">
+                <a:solidFill>
+                  <a:srgbClr val="666666"/>
+                </a:solidFill>
+                <a:latin typeface="Calibri"/>
+              </a:defRPr>
+            </a:pPr>
+            <a:r>
+              <a:t>learn_uart_spi_i2c / Module 6</a:t>
+            </a:r>
+          </a:p>
+        </p:txBody>
+      </p:sp>
+    </p:spTree>
+  </p:cSld>
+  <p:clrMapOvr>
+    <a:masterClrMapping/>
+  </p:clrMapOvr>
+</p:sld>
+</file>
+
+<file path=ppt/slides/slide19.xml><?xml version="1.0" encoding="utf-8"?>
+<p:sld xmlns:a="http://schemas.openxmlformats.org/drawingml/2006/main" xmlns:p="http://schemas.openxmlformats.org/presentationml/2006/main" xmlns:r="http://schemas.openxmlformats.org/officeDocument/2006/relationships">
+  <p:cSld>
+    <p:spTree>
+      <p:nvGrpSpPr>
+        <p:cNvPr id="1" name=""/>
+        <p:cNvGrpSpPr/>
+        <p:nvPr/>
+      </p:nvGrpSpPr>
+      <p:grpSpPr/>
+      <p:sp>
+        <p:nvSpPr>
+          <p:cNvPr id="2" name="TextBox 1"/>
+          <p:cNvSpPr txBox="1"/>
+          <p:nvPr/>
+        </p:nvSpPr>
+        <p:spPr>
+          <a:xfrm>
+            <a:off x="548640" y="2743200"/>
+            <a:ext cx="11064240" cy="1371600"/>
+          </a:xfrm>
+          <a:prstGeom prst="rect">
+            <a:avLst/>
+          </a:prstGeom>
+          <a:noFill/>
+        </p:spPr>
+        <p:txBody>
+          <a:bodyPr wrap="square">
+            <a:noAutofit/>
+          </a:bodyPr>
+          <a:lstStyle/>
+          <a:p>
+            <a:pPr algn="ctr">
+              <a:lnSpc>
+                <a:spcPts val="2200"/>
+              </a:lnSpc>
+              <a:defRPr sz="3600" b="1">
+                <a:solidFill>
+                  <a:srgbClr val="1A1A2E"/>
+                </a:solidFill>
+                <a:latin typeface="Calibri"/>
+              </a:defRPr>
+            </a:pPr>
+            <a:r>
+              <a:t>Syllabus topics</a:t>
+            </a:r>
+          </a:p>
+        </p:txBody>
+      </p:sp>
+      <p:sp>
+        <p:nvSpPr>
+          <p:cNvPr id="3" name="TextBox 2"/>
           <p:cNvSpPr txBox="1"/>
           <p:nvPr/>
         </p:nvSpPr>
@@ -5591,6 +6285,1603 @@
 </p:sld>
 </file>
 
+<file path=ppt/slides/slide20.xml><?xml version="1.0" encoding="utf-8"?>
+<p:sld xmlns:a="http://schemas.openxmlformats.org/drawingml/2006/main" xmlns:p="http://schemas.openxmlformats.org/presentationml/2006/main" xmlns:r="http://schemas.openxmlformats.org/officeDocument/2006/relationships">
+  <p:cSld>
+    <p:spTree>
+      <p:nvGrpSpPr>
+        <p:cNvPr id="1" name=""/>
+        <p:cNvGrpSpPr/>
+        <p:nvPr/>
+      </p:nvGrpSpPr>
+      <p:grpSpPr/>
+      <p:sp>
+        <p:nvSpPr>
+          <p:cNvPr id="2" name="TextBox 1"/>
+          <p:cNvSpPr txBox="1"/>
+          <p:nvPr/>
+        </p:nvSpPr>
+        <p:spPr>
+          <a:xfrm>
+            <a:off x="548640" y="411480"/>
+            <a:ext cx="11064240" cy="777240"/>
+          </a:xfrm>
+          <a:prstGeom prst="rect">
+            <a:avLst/>
+          </a:prstGeom>
+          <a:noFill/>
+        </p:spPr>
+        <p:txBody>
+          <a:bodyPr wrap="square">
+            <a:noAutofit/>
+          </a:bodyPr>
+          <a:lstStyle/>
+          <a:p>
+            <a:pPr>
+              <a:lnSpc>
+                <a:spcPts val="2200"/>
+              </a:lnSpc>
+              <a:defRPr sz="2800" b="1">
+                <a:solidFill>
+                  <a:srgbClr val="1A1A2E"/>
+                </a:solidFill>
+                <a:latin typeface="Calibri"/>
+              </a:defRPr>
+            </a:pPr>
+            <a:r>
+              <a:t>1. SPI protocol recap (Mode 0)</a:t>
+            </a:r>
+          </a:p>
+        </p:txBody>
+      </p:sp>
+      <p:sp>
+        <p:nvSpPr>
+          <p:cNvPr id="3" name="TextBox 2"/>
+          <p:cNvSpPr txBox="1"/>
+          <p:nvPr/>
+        </p:nvSpPr>
+        <p:spPr>
+          <a:xfrm>
+            <a:off x="548640" y="1234440"/>
+            <a:ext cx="11064240" cy="4937760"/>
+          </a:xfrm>
+          <a:prstGeom prst="rect">
+            <a:avLst/>
+          </a:prstGeom>
+          <a:noFill/>
+        </p:spPr>
+        <p:txBody>
+          <a:bodyPr wrap="square">
+            <a:noAutofit/>
+          </a:bodyPr>
+          <a:lstStyle/>
+          <a:p>
+            <a:pPr>
+              <a:lnSpc>
+                <a:spcPts val="2200"/>
+              </a:lnSpc>
+              <a:spcAft>
+                <a:spcPts val="1000"/>
+              </a:spcAft>
+              <a:defRPr sz="2000" b="0">
+                <a:solidFill>
+                  <a:srgbClr val="333333"/>
+                </a:solidFill>
+                <a:latin typeface="Calibri"/>
+              </a:defRPr>
+            </a:pPr>
+            <a:r>
+              <a:t>• `cs_n` frames; 8 SCLK cycles per byte; MSB first on</a:t>
+            </a:r>
+          </a:p>
+          <a:p>
+            <a:pPr>
+              <a:lnSpc>
+                <a:spcPts val="2200"/>
+              </a:lnSpc>
+              <a:spcAft>
+                <a:spcPts val="1000"/>
+              </a:spcAft>
+              <a:defRPr sz="2000" b="0">
+                <a:solidFill>
+                  <a:srgbClr val="333333"/>
+                </a:solidFill>
+                <a:latin typeface="Calibri"/>
+              </a:defRPr>
+            </a:pPr>
+            <a:r>
+              <a:t>      MOSI.</a:t>
+            </a:r>
+          </a:p>
+        </p:txBody>
+      </p:sp>
+      <p:sp>
+        <p:nvSpPr>
+          <p:cNvPr id="4" name="TextBox 3"/>
+          <p:cNvSpPr txBox="1"/>
+          <p:nvPr/>
+        </p:nvSpPr>
+        <p:spPr>
+          <a:xfrm>
+            <a:off x="548640" y="6355080"/>
+            <a:ext cx="11064240" cy="320040"/>
+          </a:xfrm>
+          <a:prstGeom prst="rect">
+            <a:avLst/>
+          </a:prstGeom>
+          <a:noFill/>
+        </p:spPr>
+        <p:txBody>
+          <a:bodyPr wrap="square">
+            <a:noAutofit/>
+          </a:bodyPr>
+          <a:lstStyle/>
+          <a:p>
+            <a:pPr algn="r">
+              <a:lnSpc>
+                <a:spcPts val="2200"/>
+              </a:lnSpc>
+              <a:defRPr sz="1000" b="0">
+                <a:solidFill>
+                  <a:srgbClr val="666666"/>
+                </a:solidFill>
+                <a:latin typeface="Calibri"/>
+              </a:defRPr>
+            </a:pPr>
+            <a:r>
+              <a:t>learn_uart_spi_i2c / Module 6</a:t>
+            </a:r>
+          </a:p>
+        </p:txBody>
+      </p:sp>
+    </p:spTree>
+  </p:cSld>
+  <p:clrMapOvr>
+    <a:masterClrMapping/>
+  </p:clrMapOvr>
+</p:sld>
+</file>
+
+<file path=ppt/slides/slide21.xml><?xml version="1.0" encoding="utf-8"?>
+<p:sld xmlns:a="http://schemas.openxmlformats.org/drawingml/2006/main" xmlns:p="http://schemas.openxmlformats.org/presentationml/2006/main" xmlns:r="http://schemas.openxmlformats.org/officeDocument/2006/relationships">
+  <p:cSld>
+    <p:spTree>
+      <p:nvGrpSpPr>
+        <p:cNvPr id="1" name=""/>
+        <p:cNvGrpSpPr/>
+        <p:nvPr/>
+      </p:nvGrpSpPr>
+      <p:grpSpPr/>
+      <p:sp>
+        <p:nvSpPr>
+          <p:cNvPr id="2" name="TextBox 1"/>
+          <p:cNvSpPr txBox="1"/>
+          <p:nvPr/>
+        </p:nvSpPr>
+        <p:spPr>
+          <a:xfrm>
+            <a:off x="548640" y="411480"/>
+            <a:ext cx="11064240" cy="777240"/>
+          </a:xfrm>
+          <a:prstGeom prst="rect">
+            <a:avLst/>
+          </a:prstGeom>
+          <a:noFill/>
+        </p:spPr>
+        <p:txBody>
+          <a:bodyPr wrap="square">
+            <a:noAutofit/>
+          </a:bodyPr>
+          <a:lstStyle/>
+          <a:p>
+            <a:pPr>
+              <a:lnSpc>
+                <a:spcPts val="2200"/>
+              </a:lnSpc>
+              <a:defRPr sz="2800" b="1">
+                <a:solidFill>
+                  <a:srgbClr val="1A1A2E"/>
+                </a:solidFill>
+                <a:latin typeface="Calibri"/>
+              </a:defRPr>
+            </a:pPr>
+            <a:r>
+              <a:t>2. Toolchain</a:t>
+            </a:r>
+          </a:p>
+        </p:txBody>
+      </p:sp>
+      <p:sp>
+        <p:nvSpPr>
+          <p:cNvPr id="3" name="TextBox 2"/>
+          <p:cNvSpPr txBox="1"/>
+          <p:nvPr/>
+        </p:nvSpPr>
+        <p:spPr>
+          <a:xfrm>
+            <a:off x="548640" y="1234440"/>
+            <a:ext cx="11064240" cy="4937760"/>
+          </a:xfrm>
+          <a:prstGeom prst="rect">
+            <a:avLst/>
+          </a:prstGeom>
+          <a:noFill/>
+        </p:spPr>
+        <p:txBody>
+          <a:bodyPr wrap="square">
+            <a:noAutofit/>
+          </a:bodyPr>
+          <a:lstStyle/>
+          <a:p>
+            <a:pPr>
+              <a:lnSpc>
+                <a:spcPts val="2200"/>
+              </a:lnSpc>
+              <a:spcAft>
+                <a:spcPts val="1000"/>
+              </a:spcAft>
+              <a:defRPr sz="2000" b="0">
+                <a:solidFill>
+                  <a:srgbClr val="333333"/>
+                </a:solidFill>
+                <a:latin typeface="Calibri"/>
+              </a:defRPr>
+            </a:pPr>
+            <a:r>
+              <a:t>• `make SIM=verilator TEST=test_spi_uvm`;</a:t>
+            </a:r>
+          </a:p>
+          <a:p>
+            <a:pPr>
+              <a:lnSpc>
+                <a:spcPts val="2200"/>
+              </a:lnSpc>
+              <a:spcAft>
+                <a:spcPts val="1000"/>
+              </a:spcAft>
+              <a:defRPr sz="2000" b="0">
+                <a:solidFill>
+                  <a:srgbClr val="333333"/>
+                </a:solidFill>
+                <a:latin typeface="Calibri"/>
+              </a:defRPr>
+            </a:pPr>
+            <a:r>
+              <a:t>      `+UVM_TESTNAME=SpiTest`.</a:t>
+            </a:r>
+          </a:p>
+        </p:txBody>
+      </p:sp>
+      <p:sp>
+        <p:nvSpPr>
+          <p:cNvPr id="4" name="TextBox 3"/>
+          <p:cNvSpPr txBox="1"/>
+          <p:nvPr/>
+        </p:nvSpPr>
+        <p:spPr>
+          <a:xfrm>
+            <a:off x="548640" y="6355080"/>
+            <a:ext cx="11064240" cy="320040"/>
+          </a:xfrm>
+          <a:prstGeom prst="rect">
+            <a:avLst/>
+          </a:prstGeom>
+          <a:noFill/>
+        </p:spPr>
+        <p:txBody>
+          <a:bodyPr wrap="square">
+            <a:noAutofit/>
+          </a:bodyPr>
+          <a:lstStyle/>
+          <a:p>
+            <a:pPr algn="r">
+              <a:lnSpc>
+                <a:spcPts val="2200"/>
+              </a:lnSpc>
+              <a:defRPr sz="1000" b="0">
+                <a:solidFill>
+                  <a:srgbClr val="666666"/>
+                </a:solidFill>
+                <a:latin typeface="Calibri"/>
+              </a:defRPr>
+            </a:pPr>
+            <a:r>
+              <a:t>learn_uart_spi_i2c / Module 6</a:t>
+            </a:r>
+          </a:p>
+        </p:txBody>
+      </p:sp>
+    </p:spTree>
+  </p:cSld>
+  <p:clrMapOvr>
+    <a:masterClrMapping/>
+  </p:clrMapOvr>
+</p:sld>
+</file>
+
+<file path=ppt/slides/slide22.xml><?xml version="1.0" encoding="utf-8"?>
+<p:sld xmlns:a="http://schemas.openxmlformats.org/drawingml/2006/main" xmlns:p="http://schemas.openxmlformats.org/presentationml/2006/main" xmlns:r="http://schemas.openxmlformats.org/officeDocument/2006/relationships">
+  <p:cSld>
+    <p:spTree>
+      <p:nvGrpSpPr>
+        <p:cNvPr id="1" name=""/>
+        <p:cNvGrpSpPr/>
+        <p:nvPr/>
+      </p:nvGrpSpPr>
+      <p:grpSpPr/>
+      <p:sp>
+        <p:nvSpPr>
+          <p:cNvPr id="2" name="TextBox 1"/>
+          <p:cNvSpPr txBox="1"/>
+          <p:nvPr/>
+        </p:nvSpPr>
+        <p:spPr>
+          <a:xfrm>
+            <a:off x="548640" y="2743200"/>
+            <a:ext cx="11064240" cy="1371600"/>
+          </a:xfrm>
+          <a:prstGeom prst="rect">
+            <a:avLst/>
+          </a:prstGeom>
+          <a:noFill/>
+        </p:spPr>
+        <p:txBody>
+          <a:bodyPr wrap="square">
+            <a:noAutofit/>
+          </a:bodyPr>
+          <a:lstStyle/>
+          <a:p>
+            <a:pPr algn="ctr">
+              <a:lnSpc>
+                <a:spcPts val="2200"/>
+              </a:lnSpc>
+              <a:defRPr sz="3600" b="1">
+                <a:solidFill>
+                  <a:srgbClr val="1A1A2E"/>
+                </a:solidFill>
+                <a:latin typeface="Calibri"/>
+              </a:defRPr>
+            </a:pPr>
+            <a:r>
+              <a:t>Hands-on examples</a:t>
+            </a:r>
+          </a:p>
+        </p:txBody>
+      </p:sp>
+      <p:sp>
+        <p:nvSpPr>
+          <p:cNvPr id="3" name="TextBox 2"/>
+          <p:cNvSpPr txBox="1"/>
+          <p:nvPr/>
+        </p:nvSpPr>
+        <p:spPr>
+          <a:xfrm>
+            <a:off x="548640" y="6355080"/>
+            <a:ext cx="11064240" cy="320040"/>
+          </a:xfrm>
+          <a:prstGeom prst="rect">
+            <a:avLst/>
+          </a:prstGeom>
+          <a:noFill/>
+        </p:spPr>
+        <p:txBody>
+          <a:bodyPr wrap="square">
+            <a:noAutofit/>
+          </a:bodyPr>
+          <a:lstStyle/>
+          <a:p>
+            <a:pPr algn="r">
+              <a:lnSpc>
+                <a:spcPts val="2200"/>
+              </a:lnSpc>
+              <a:defRPr sz="1000" b="0">
+                <a:solidFill>
+                  <a:srgbClr val="666666"/>
+                </a:solidFill>
+                <a:latin typeface="Calibri"/>
+              </a:defRPr>
+            </a:pPr>
+            <a:r>
+              <a:t>learn_uart_spi_i2c / Module 6</a:t>
+            </a:r>
+          </a:p>
+        </p:txBody>
+      </p:sp>
+    </p:spTree>
+  </p:cSld>
+  <p:clrMapOvr>
+    <a:masterClrMapping/>
+  </p:clrMapOvr>
+</p:sld>
+</file>
+
+<file path=ppt/slides/slide23.xml><?xml version="1.0" encoding="utf-8"?>
+<p:sld xmlns:a="http://schemas.openxmlformats.org/drawingml/2006/main" xmlns:p="http://schemas.openxmlformats.org/presentationml/2006/main" xmlns:r="http://schemas.openxmlformats.org/officeDocument/2006/relationships">
+  <p:cSld>
+    <p:spTree>
+      <p:nvGrpSpPr>
+        <p:cNvPr id="1" name=""/>
+        <p:cNvGrpSpPr/>
+        <p:nvPr/>
+      </p:nvGrpSpPr>
+      <p:grpSpPr/>
+      <p:sp>
+        <p:nvSpPr>
+          <p:cNvPr id="2" name="TextBox 1"/>
+          <p:cNvSpPr txBox="1"/>
+          <p:nvPr/>
+        </p:nvSpPr>
+        <p:spPr>
+          <a:xfrm>
+            <a:off x="548640" y="411480"/>
+            <a:ext cx="11064240" cy="777240"/>
+          </a:xfrm>
+          <a:prstGeom prst="rect">
+            <a:avLst/>
+          </a:prstGeom>
+          <a:noFill/>
+        </p:spPr>
+        <p:txBody>
+          <a:bodyPr wrap="square">
+            <a:noAutofit/>
+          </a:bodyPr>
+          <a:lstStyle/>
+          <a:p>
+            <a:pPr>
+              <a:lnSpc>
+                <a:spcPts val="2200"/>
+              </a:lnSpc>
+              <a:defRPr sz="2800" b="1">
+                <a:solidFill>
+                  <a:srgbClr val="1A1A2E"/>
+                </a:solidFill>
+                <a:latin typeface="Calibri"/>
+              </a:defRPr>
+            </a:pPr>
+            <a:r>
+              <a:t>Module 6 self-check</a:t>
+            </a:r>
+          </a:p>
+        </p:txBody>
+      </p:sp>
+      <p:sp>
+        <p:nvSpPr>
+          <p:cNvPr id="3" name="TextBox 2"/>
+          <p:cNvSpPr txBox="1"/>
+          <p:nvPr/>
+        </p:nvSpPr>
+        <p:spPr>
+          <a:xfrm>
+            <a:off x="548640" y="1051560"/>
+            <a:ext cx="11064240" cy="914400"/>
+          </a:xfrm>
+          <a:prstGeom prst="rect">
+            <a:avLst/>
+          </a:prstGeom>
+          <a:solidFill>
+            <a:srgbClr val="F4F4F4"/>
+          </a:solidFill>
+        </p:spPr>
+        <p:txBody>
+          <a:bodyPr wrap="square">
+            <a:noAutofit/>
+          </a:bodyPr>
+          <a:lstStyle/>
+          <a:p>
+            <a:pPr>
+              <a:lnSpc>
+                <a:spcPts val="2200"/>
+              </a:lnSpc>
+              <a:spcAft>
+                <a:spcPts val="200"/>
+              </a:spcAft>
+              <a:defRPr sz="2000" b="0">
+                <a:solidFill>
+                  <a:srgbClr val="333333"/>
+                </a:solidFill>
+                <a:latin typeface="Consolas"/>
+              </a:defRPr>
+            </a:pPr>
+            <a:r>
+              <a:t>$ ./scripts/module6.sh --help</a:t>
+            </a:r>
+          </a:p>
+        </p:txBody>
+      </p:sp>
+      <p:pic>
+        <p:nvPicPr>
+          <p:cNvPr id="4" name="Picture 3" descr="module6_check.png"/>
+          <p:cNvPicPr>
+            <a:picLocks noChangeAspect="1"/>
+          </p:cNvPicPr>
+          <p:nvPr/>
+        </p:nvPicPr>
+        <p:blipFill>
+          <a:blip r:embed="rId2"/>
+          <a:stretch>
+            <a:fillRect/>
+          </a:stretch>
+        </p:blipFill>
+        <p:spPr>
+          <a:xfrm>
+            <a:off x="548640" y="1965960"/>
+            <a:ext cx="7071358" cy="3977639"/>
+          </a:xfrm>
+          <a:prstGeom prst="rect">
+            <a:avLst/>
+          </a:prstGeom>
+        </p:spPr>
+      </p:pic>
+      <p:sp>
+        <p:nvSpPr>
+          <p:cNvPr id="5" name="TextBox 4"/>
+          <p:cNvSpPr txBox="1"/>
+          <p:nvPr/>
+        </p:nvSpPr>
+        <p:spPr>
+          <a:xfrm>
+            <a:off x="548640" y="6355080"/>
+            <a:ext cx="11064240" cy="320040"/>
+          </a:xfrm>
+          <a:prstGeom prst="rect">
+            <a:avLst/>
+          </a:prstGeom>
+          <a:noFill/>
+        </p:spPr>
+        <p:txBody>
+          <a:bodyPr wrap="square">
+            <a:noAutofit/>
+          </a:bodyPr>
+          <a:lstStyle/>
+          <a:p>
+            <a:pPr algn="r">
+              <a:lnSpc>
+                <a:spcPts val="2200"/>
+              </a:lnSpc>
+              <a:defRPr sz="1000" b="0">
+                <a:solidFill>
+                  <a:srgbClr val="666666"/>
+                </a:solidFill>
+                <a:latin typeface="Calibri"/>
+              </a:defRPr>
+            </a:pPr>
+            <a:r>
+              <a:t>learn_uart_spi_i2c / Module 6</a:t>
+            </a:r>
+          </a:p>
+        </p:txBody>
+      </p:sp>
+    </p:spTree>
+  </p:cSld>
+  <p:clrMapOvr>
+    <a:masterClrMapping/>
+  </p:clrMapOvr>
+</p:sld>
+</file>
+
+<file path=ppt/slides/slide24.xml><?xml version="1.0" encoding="utf-8"?>
+<p:sld xmlns:a="http://schemas.openxmlformats.org/drawingml/2006/main" xmlns:p="http://schemas.openxmlformats.org/presentationml/2006/main" xmlns:r="http://schemas.openxmlformats.org/officeDocument/2006/relationships">
+  <p:cSld>
+    <p:spTree>
+      <p:nvGrpSpPr>
+        <p:cNvPr id="1" name=""/>
+        <p:cNvGrpSpPr/>
+        <p:nvPr/>
+      </p:nvGrpSpPr>
+      <p:grpSpPr/>
+      <p:sp>
+        <p:nvSpPr>
+          <p:cNvPr id="2" name="TextBox 1"/>
+          <p:cNvSpPr txBox="1"/>
+          <p:nvPr/>
+        </p:nvSpPr>
+        <p:spPr>
+          <a:xfrm>
+            <a:off x="548640" y="411480"/>
+            <a:ext cx="11064240" cy="777240"/>
+          </a:xfrm>
+          <a:prstGeom prst="rect">
+            <a:avLst/>
+          </a:prstGeom>
+          <a:noFill/>
+        </p:spPr>
+        <p:txBody>
+          <a:bodyPr wrap="square">
+            <a:noAutofit/>
+          </a:bodyPr>
+          <a:lstStyle/>
+          <a:p>
+            <a:pPr>
+              <a:lnSpc>
+                <a:spcPts val="2200"/>
+              </a:lnSpc>
+              <a:defRPr sz="2800" b="1">
+                <a:solidFill>
+                  <a:srgbClr val="1A1A2E"/>
+                </a:solidFill>
+                <a:latin typeface="Calibri"/>
+              </a:defRPr>
+            </a:pPr>
+            <a:r>
+              <a:t>Exercise scaffold</a:t>
+            </a:r>
+          </a:p>
+        </p:txBody>
+      </p:sp>
+      <p:sp>
+        <p:nvSpPr>
+          <p:cNvPr id="3" name="TextBox 2"/>
+          <p:cNvSpPr txBox="1"/>
+          <p:nvPr/>
+        </p:nvSpPr>
+        <p:spPr>
+          <a:xfrm>
+            <a:off x="548640" y="1143000"/>
+            <a:ext cx="11064240" cy="5029200"/>
+          </a:xfrm>
+          <a:prstGeom prst="rect">
+            <a:avLst/>
+          </a:prstGeom>
+          <a:solidFill>
+            <a:srgbClr val="F4F4F4"/>
+          </a:solidFill>
+        </p:spPr>
+        <p:txBody>
+          <a:bodyPr wrap="square">
+            <a:noAutofit/>
+          </a:bodyPr>
+          <a:lstStyle/>
+          <a:p>
+            <a:pPr>
+              <a:lnSpc>
+                <a:spcPts val="2200"/>
+              </a:lnSpc>
+              <a:spcAft>
+                <a:spcPts val="400"/>
+              </a:spcAft>
+              <a:defRPr sz="2000" b="0">
+                <a:solidFill>
+                  <a:srgbClr val="333333"/>
+                </a:solidFill>
+                <a:latin typeface="Consolas"/>
+              </a:defRPr>
+            </a:pPr>
+            <a:r>
+              <a:t>./scripts/module6.sh --scaffold</a:t>
+            </a:r>
+          </a:p>
+        </p:txBody>
+      </p:sp>
+      <p:sp>
+        <p:nvSpPr>
+          <p:cNvPr id="4" name="TextBox 3"/>
+          <p:cNvSpPr txBox="1"/>
+          <p:nvPr/>
+        </p:nvSpPr>
+        <p:spPr>
+          <a:xfrm>
+            <a:off x="548640" y="6355080"/>
+            <a:ext cx="11064240" cy="320040"/>
+          </a:xfrm>
+          <a:prstGeom prst="rect">
+            <a:avLst/>
+          </a:prstGeom>
+          <a:noFill/>
+        </p:spPr>
+        <p:txBody>
+          <a:bodyPr wrap="square">
+            <a:noAutofit/>
+          </a:bodyPr>
+          <a:lstStyle/>
+          <a:p>
+            <a:pPr algn="r">
+              <a:lnSpc>
+                <a:spcPts val="2200"/>
+              </a:lnSpc>
+              <a:defRPr sz="1000" b="0">
+                <a:solidFill>
+                  <a:srgbClr val="666666"/>
+                </a:solidFill>
+                <a:latin typeface="Calibri"/>
+              </a:defRPr>
+            </a:pPr>
+            <a:r>
+              <a:t>learn_uart_spi_i2c / Module 6</a:t>
+            </a:r>
+          </a:p>
+        </p:txBody>
+      </p:sp>
+    </p:spTree>
+  </p:cSld>
+  <p:clrMapOvr>
+    <a:masterClrMapping/>
+  </p:clrMapOvr>
+</p:sld>
+</file>
+
+<file path=ppt/slides/slide25.xml><?xml version="1.0" encoding="utf-8"?>
+<p:sld xmlns:a="http://schemas.openxmlformats.org/drawingml/2006/main" xmlns:p="http://schemas.openxmlformats.org/presentationml/2006/main" xmlns:r="http://schemas.openxmlformats.org/officeDocument/2006/relationships">
+  <p:cSld>
+    <p:spTree>
+      <p:nvGrpSpPr>
+        <p:cNvPr id="1" name=""/>
+        <p:cNvGrpSpPr/>
+        <p:nvPr/>
+      </p:nvGrpSpPr>
+      <p:grpSpPr/>
+      <p:sp>
+        <p:nvSpPr>
+          <p:cNvPr id="2" name="TextBox 1"/>
+          <p:cNvSpPr txBox="1"/>
+          <p:nvPr/>
+        </p:nvSpPr>
+        <p:spPr>
+          <a:xfrm>
+            <a:off x="548640" y="411480"/>
+            <a:ext cx="11064240" cy="777240"/>
+          </a:xfrm>
+          <a:prstGeom prst="rect">
+            <a:avLst/>
+          </a:prstGeom>
+          <a:noFill/>
+        </p:spPr>
+        <p:txBody>
+          <a:bodyPr wrap="square">
+            <a:noAutofit/>
+          </a:bodyPr>
+          <a:lstStyle/>
+          <a:p>
+            <a:pPr>
+              <a:lnSpc>
+                <a:spcPts val="2200"/>
+              </a:lnSpc>
+              <a:defRPr sz="2800" b="1">
+                <a:solidFill>
+                  <a:srgbClr val="1A1A2E"/>
+                </a:solidFill>
+                <a:latin typeface="Calibri"/>
+              </a:defRPr>
+            </a:pPr>
+            <a:r>
+              <a:t>Example 1: SPI UVM</a:t>
+            </a:r>
+          </a:p>
+        </p:txBody>
+      </p:sp>
+      <p:sp>
+        <p:nvSpPr>
+          <p:cNvPr id="3" name="TextBox 2"/>
+          <p:cNvSpPr txBox="1"/>
+          <p:nvPr/>
+        </p:nvSpPr>
+        <p:spPr>
+          <a:xfrm>
+            <a:off x="548640" y="1234440"/>
+            <a:ext cx="11064240" cy="4937760"/>
+          </a:xfrm>
+          <a:prstGeom prst="rect">
+            <a:avLst/>
+          </a:prstGeom>
+          <a:noFill/>
+        </p:spPr>
+        <p:txBody>
+          <a:bodyPr wrap="square">
+            <a:noAutofit/>
+          </a:bodyPr>
+          <a:lstStyle/>
+          <a:p>
+            <a:pPr>
+              <a:lnSpc>
+                <a:spcPts val="2200"/>
+              </a:lnSpc>
+              <a:spcAft>
+                <a:spcPts val="1000"/>
+              </a:spcAft>
+              <a:defRPr sz="2000" b="0">
+                <a:solidFill>
+                  <a:srgbClr val="333333"/>
+                </a:solidFill>
+                <a:latin typeface="Calibri"/>
+              </a:defRPr>
+            </a:pPr>
+            <a:r>
+              <a:t>• UVM phases and reporting (DRIVER, MONITOR,</a:t>
+            </a:r>
+          </a:p>
+          <a:p>
+            <a:pPr>
+              <a:lnSpc>
+                <a:spcPts val="2200"/>
+              </a:lnSpc>
+              <a:spcAft>
+                <a:spcPts val="1000"/>
+              </a:spcAft>
+              <a:defRPr sz="2000" b="0">
+                <a:solidFill>
+                  <a:srgbClr val="333333"/>
+                </a:solidFill>
+                <a:latin typeface="Calibri"/>
+              </a:defRPr>
+            </a:pPr>
+            <a:r>
+              <a:t>      SCOREBOARD).</a:t>
+            </a:r>
+          </a:p>
+          <a:p>
+            <a:pPr>
+              <a:lnSpc>
+                <a:spcPts val="2200"/>
+              </a:lnSpc>
+              <a:spcAft>
+                <a:spcPts val="1000"/>
+              </a:spcAft>
+              <a:defRPr sz="2000" b="0">
+                <a:solidFill>
+                  <a:srgbClr val="333333"/>
+                </a:solidFill>
+                <a:latin typeface="Calibri"/>
+              </a:defRPr>
+            </a:pPr>
+            <a:r>
+              <a:t>• Scoreboard checks (expected byte from sequence vs</a:t>
+            </a:r>
+          </a:p>
+          <a:p>
+            <a:pPr>
+              <a:lnSpc>
+                <a:spcPts val="2200"/>
+              </a:lnSpc>
+              <a:spcAft>
+                <a:spcPts val="1000"/>
+              </a:spcAft>
+              <a:defRPr sz="2000" b="0">
+                <a:solidFill>
+                  <a:srgbClr val="333333"/>
+                </a:solidFill>
+                <a:latin typeface="Calibri"/>
+              </a:defRPr>
+            </a:pPr>
+            <a:r>
+              <a:t>      observed byte on MOSI).</a:t>
+            </a:r>
+          </a:p>
+          <a:p>
+            <a:pPr>
+              <a:lnSpc>
+                <a:spcPts val="2200"/>
+              </a:lnSpc>
+              <a:spcAft>
+                <a:spcPts val="1000"/>
+              </a:spcAft>
+              <a:defRPr sz="2000" b="0">
+                <a:solidFill>
+                  <a:srgbClr val="333333"/>
+                </a:solidFill>
+                <a:latin typeface="Calibri"/>
+              </a:defRPr>
+            </a:pPr>
+            <a:r>
+              <a:t>• Final scoreboard summary (matches and mismatches).</a:t>
+            </a:r>
+          </a:p>
+        </p:txBody>
+      </p:sp>
+      <p:sp>
+        <p:nvSpPr>
+          <p:cNvPr id="4" name="TextBox 3"/>
+          <p:cNvSpPr txBox="1"/>
+          <p:nvPr/>
+        </p:nvSpPr>
+        <p:spPr>
+          <a:xfrm>
+            <a:off x="548640" y="6355080"/>
+            <a:ext cx="11064240" cy="320040"/>
+          </a:xfrm>
+          <a:prstGeom prst="rect">
+            <a:avLst/>
+          </a:prstGeom>
+          <a:noFill/>
+        </p:spPr>
+        <p:txBody>
+          <a:bodyPr wrap="square">
+            <a:noAutofit/>
+          </a:bodyPr>
+          <a:lstStyle/>
+          <a:p>
+            <a:pPr algn="r">
+              <a:lnSpc>
+                <a:spcPts val="2200"/>
+              </a:lnSpc>
+              <a:defRPr sz="1000" b="0">
+                <a:solidFill>
+                  <a:srgbClr val="666666"/>
+                </a:solidFill>
+                <a:latin typeface="Calibri"/>
+              </a:defRPr>
+            </a:pPr>
+            <a:r>
+              <a:t>learn_uart_spi_i2c / Module 6</a:t>
+            </a:r>
+          </a:p>
+        </p:txBody>
+      </p:sp>
+    </p:spTree>
+  </p:cSld>
+  <p:clrMapOvr>
+    <a:masterClrMapping/>
+  </p:clrMapOvr>
+</p:sld>
+</file>
+
+<file path=ppt/slides/slide26.xml><?xml version="1.0" encoding="utf-8"?>
+<p:sld xmlns:a="http://schemas.openxmlformats.org/drawingml/2006/main" xmlns:p="http://schemas.openxmlformats.org/presentationml/2006/main" xmlns:r="http://schemas.openxmlformats.org/officeDocument/2006/relationships">
+  <p:cSld>
+    <p:spTree>
+      <p:nvGrpSpPr>
+        <p:cNvPr id="1" name=""/>
+        <p:cNvGrpSpPr/>
+        <p:nvPr/>
+      </p:nvGrpSpPr>
+      <p:grpSpPr/>
+      <p:sp>
+        <p:nvSpPr>
+          <p:cNvPr id="2" name="TextBox 1"/>
+          <p:cNvSpPr txBox="1"/>
+          <p:nvPr/>
+        </p:nvSpPr>
+        <p:spPr>
+          <a:xfrm>
+            <a:off x="548640" y="411480"/>
+            <a:ext cx="11064240" cy="777240"/>
+          </a:xfrm>
+          <a:prstGeom prst="rect">
+            <a:avLst/>
+          </a:prstGeom>
+          <a:noFill/>
+        </p:spPr>
+        <p:txBody>
+          <a:bodyPr wrap="square">
+            <a:noAutofit/>
+          </a:bodyPr>
+          <a:lstStyle/>
+          <a:p>
+            <a:pPr>
+              <a:lnSpc>
+                <a:spcPts val="2200"/>
+              </a:lnSpc>
+              <a:defRPr sz="2800" b="1">
+                <a:solidFill>
+                  <a:srgbClr val="1A1A2E"/>
+                </a:solidFill>
+                <a:latin typeface="Calibri"/>
+              </a:defRPr>
+            </a:pPr>
+            <a:r>
+              <a:t>Demo: SPI UVM</a:t>
+            </a:r>
+          </a:p>
+        </p:txBody>
+      </p:sp>
+      <p:sp>
+        <p:nvSpPr>
+          <p:cNvPr id="3" name="TextBox 2"/>
+          <p:cNvSpPr txBox="1"/>
+          <p:nvPr/>
+        </p:nvSpPr>
+        <p:spPr>
+          <a:xfrm>
+            <a:off x="548640" y="1051560"/>
+            <a:ext cx="11064240" cy="914400"/>
+          </a:xfrm>
+          <a:prstGeom prst="rect">
+            <a:avLst/>
+          </a:prstGeom>
+          <a:solidFill>
+            <a:srgbClr val="F4F4F4"/>
+          </a:solidFill>
+        </p:spPr>
+        <p:txBody>
+          <a:bodyPr wrap="square">
+            <a:noAutofit/>
+          </a:bodyPr>
+          <a:lstStyle/>
+          <a:p>
+            <a:pPr>
+              <a:lnSpc>
+                <a:spcPts val="2200"/>
+              </a:lnSpc>
+              <a:spcAft>
+                <a:spcPts val="200"/>
+              </a:spcAft>
+              <a:defRPr sz="2000" b="0">
+                <a:solidFill>
+                  <a:srgbClr val="333333"/>
+                </a:solidFill>
+                <a:latin typeface="Consolas"/>
+              </a:defRPr>
+            </a:pPr>
+            <a:r>
+              <a:t>$ ./scripts/module6.sh --run</a:t>
+            </a:r>
+          </a:p>
+        </p:txBody>
+      </p:sp>
+      <p:pic>
+        <p:nvPicPr>
+          <p:cNvPr id="4" name="Picture 3" descr="spi_uvm.png"/>
+          <p:cNvPicPr>
+            <a:picLocks noChangeAspect="1"/>
+          </p:cNvPicPr>
+          <p:nvPr/>
+        </p:nvPicPr>
+        <p:blipFill>
+          <a:blip r:embed="rId2"/>
+          <a:stretch>
+            <a:fillRect/>
+          </a:stretch>
+        </p:blipFill>
+        <p:spPr>
+          <a:xfrm>
+            <a:off x="548640" y="1965960"/>
+            <a:ext cx="7071358" cy="3977639"/>
+          </a:xfrm>
+          <a:prstGeom prst="rect">
+            <a:avLst/>
+          </a:prstGeom>
+        </p:spPr>
+      </p:pic>
+      <p:sp>
+        <p:nvSpPr>
+          <p:cNvPr id="5" name="TextBox 4"/>
+          <p:cNvSpPr txBox="1"/>
+          <p:nvPr/>
+        </p:nvSpPr>
+        <p:spPr>
+          <a:xfrm>
+            <a:off x="548640" y="6355080"/>
+            <a:ext cx="11064240" cy="320040"/>
+          </a:xfrm>
+          <a:prstGeom prst="rect">
+            <a:avLst/>
+          </a:prstGeom>
+          <a:noFill/>
+        </p:spPr>
+        <p:txBody>
+          <a:bodyPr wrap="square">
+            <a:noAutofit/>
+          </a:bodyPr>
+          <a:lstStyle/>
+          <a:p>
+            <a:pPr algn="r">
+              <a:lnSpc>
+                <a:spcPts val="2200"/>
+              </a:lnSpc>
+              <a:defRPr sz="1000" b="0">
+                <a:solidFill>
+                  <a:srgbClr val="666666"/>
+                </a:solidFill>
+                <a:latin typeface="Calibri"/>
+              </a:defRPr>
+            </a:pPr>
+            <a:r>
+              <a:t>learn_uart_spi_i2c / Module 6</a:t>
+            </a:r>
+          </a:p>
+        </p:txBody>
+      </p:sp>
+    </p:spTree>
+  </p:cSld>
+  <p:clrMapOvr>
+    <a:masterClrMapping/>
+  </p:clrMapOvr>
+</p:sld>
+</file>
+
+<file path=ppt/slides/slide27.xml><?xml version="1.0" encoding="utf-8"?>
+<p:sld xmlns:a="http://schemas.openxmlformats.org/drawingml/2006/main" xmlns:p="http://schemas.openxmlformats.org/presentationml/2006/main" xmlns:r="http://schemas.openxmlformats.org/officeDocument/2006/relationships">
+  <p:cSld>
+    <p:spTree>
+      <p:nvGrpSpPr>
+        <p:cNvPr id="1" name=""/>
+        <p:cNvGrpSpPr/>
+        <p:nvPr/>
+      </p:nvGrpSpPr>
+      <p:grpSpPr/>
+      <p:sp>
+        <p:nvSpPr>
+          <p:cNvPr id="2" name="TextBox 1"/>
+          <p:cNvSpPr txBox="1"/>
+          <p:nvPr/>
+        </p:nvSpPr>
+        <p:spPr>
+          <a:xfrm>
+            <a:off x="548640" y="2743200"/>
+            <a:ext cx="11064240" cy="1371600"/>
+          </a:xfrm>
+          <a:prstGeom prst="rect">
+            <a:avLst/>
+          </a:prstGeom>
+          <a:noFill/>
+        </p:spPr>
+        <p:txBody>
+          <a:bodyPr wrap="square">
+            <a:noAutofit/>
+          </a:bodyPr>
+          <a:lstStyle/>
+          <a:p>
+            <a:pPr algn="ctr">
+              <a:lnSpc>
+                <a:spcPts val="2200"/>
+              </a:lnSpc>
+              <a:defRPr sz="3600" b="1">
+                <a:solidFill>
+                  <a:srgbClr val="1A1A2E"/>
+                </a:solidFill>
+                <a:latin typeface="Calibri"/>
+              </a:defRPr>
+            </a:pPr>
+            <a:r>
+              <a:t>Practice &amp; assessment</a:t>
+            </a:r>
+          </a:p>
+        </p:txBody>
+      </p:sp>
+      <p:sp>
+        <p:nvSpPr>
+          <p:cNvPr id="3" name="TextBox 2"/>
+          <p:cNvSpPr txBox="1"/>
+          <p:nvPr/>
+        </p:nvSpPr>
+        <p:spPr>
+          <a:xfrm>
+            <a:off x="548640" y="6355080"/>
+            <a:ext cx="11064240" cy="320040"/>
+          </a:xfrm>
+          <a:prstGeom prst="rect">
+            <a:avLst/>
+          </a:prstGeom>
+          <a:noFill/>
+        </p:spPr>
+        <p:txBody>
+          <a:bodyPr wrap="square">
+            <a:noAutofit/>
+          </a:bodyPr>
+          <a:lstStyle/>
+          <a:p>
+            <a:pPr algn="r">
+              <a:lnSpc>
+                <a:spcPts val="2200"/>
+              </a:lnSpc>
+              <a:defRPr sz="1000" b="0">
+                <a:solidFill>
+                  <a:srgbClr val="666666"/>
+                </a:solidFill>
+                <a:latin typeface="Calibri"/>
+              </a:defRPr>
+            </a:pPr>
+            <a:r>
+              <a:t>learn_uart_spi_i2c / Module 6</a:t>
+            </a:r>
+          </a:p>
+        </p:txBody>
+      </p:sp>
+    </p:spTree>
+  </p:cSld>
+  <p:clrMapOvr>
+    <a:masterClrMapping/>
+  </p:clrMapOvr>
+</p:sld>
+</file>
+
+<file path=ppt/slides/slide28.xml><?xml version="1.0" encoding="utf-8"?>
+<p:sld xmlns:a="http://schemas.openxmlformats.org/drawingml/2006/main" xmlns:p="http://schemas.openxmlformats.org/presentationml/2006/main" xmlns:r="http://schemas.openxmlformats.org/officeDocument/2006/relationships">
+  <p:cSld>
+    <p:spTree>
+      <p:nvGrpSpPr>
+        <p:cNvPr id="1" name=""/>
+        <p:cNvGrpSpPr/>
+        <p:nvPr/>
+      </p:nvGrpSpPr>
+      <p:grpSpPr/>
+      <p:sp>
+        <p:nvSpPr>
+          <p:cNvPr id="2" name="TextBox 1"/>
+          <p:cNvSpPr txBox="1"/>
+          <p:nvPr/>
+        </p:nvSpPr>
+        <p:spPr>
+          <a:xfrm>
+            <a:off x="548640" y="411480"/>
+            <a:ext cx="11064240" cy="777240"/>
+          </a:xfrm>
+          <a:prstGeom prst="rect">
+            <a:avLst/>
+          </a:prstGeom>
+          <a:noFill/>
+        </p:spPr>
+        <p:txBody>
+          <a:bodyPr wrap="square">
+            <a:noAutofit/>
+          </a:bodyPr>
+          <a:lstStyle/>
+          <a:p>
+            <a:pPr>
+              <a:lnSpc>
+                <a:spcPts val="2200"/>
+              </a:lnSpc>
+              <a:defRPr sz="2800" b="1">
+                <a:solidFill>
+                  <a:srgbClr val="1A1A2E"/>
+                </a:solidFill>
+                <a:latin typeface="Calibri"/>
+              </a:defRPr>
+            </a:pPr>
+            <a:r>
+              <a:t>What you should know</a:t>
+            </a:r>
+          </a:p>
+        </p:txBody>
+      </p:sp>
+      <p:sp>
+        <p:nvSpPr>
+          <p:cNvPr id="3" name="TextBox 2"/>
+          <p:cNvSpPr txBox="1"/>
+          <p:nvPr/>
+        </p:nvSpPr>
+        <p:spPr>
+          <a:xfrm>
+            <a:off x="548640" y="1234440"/>
+            <a:ext cx="11064240" cy="4937760"/>
+          </a:xfrm>
+          <a:prstGeom prst="rect">
+            <a:avLst/>
+          </a:prstGeom>
+          <a:noFill/>
+        </p:spPr>
+        <p:txBody>
+          <a:bodyPr wrap="square">
+            <a:noAutofit/>
+          </a:bodyPr>
+          <a:lstStyle/>
+          <a:p>
+            <a:pPr>
+              <a:lnSpc>
+                <a:spcPts val="2200"/>
+              </a:lnSpc>
+              <a:spcAft>
+                <a:spcPts val="1000"/>
+              </a:spcAft>
+              <a:defRPr sz="2000" b="0">
+                <a:solidFill>
+                  <a:srgbClr val="333333"/>
+                </a:solidFill>
+                <a:latin typeface="Calibri"/>
+              </a:defRPr>
+            </a:pPr>
+            <a:r>
+              <a:t>• Describe the SPI UVM agent (transaction, sequence,</a:t>
+            </a:r>
+          </a:p>
+          <a:p>
+            <a:pPr>
+              <a:lnSpc>
+                <a:spcPts val="2200"/>
+              </a:lnSpc>
+              <a:spcAft>
+                <a:spcPts val="1000"/>
+              </a:spcAft>
+              <a:defRPr sz="2000" b="0">
+                <a:solidFill>
+                  <a:srgbClr val="333333"/>
+                </a:solidFill>
+                <a:latin typeface="Calibri"/>
+              </a:defRPr>
+            </a:pPr>
+            <a:r>
+              <a:t>      driver, monitor, scoreboard) and mode 0 monitori…</a:t>
+            </a:r>
+          </a:p>
+          <a:p>
+            <a:pPr>
+              <a:lnSpc>
+                <a:spcPts val="2200"/>
+              </a:lnSpc>
+              <a:spcAft>
+                <a:spcPts val="1000"/>
+              </a:spcAft>
+              <a:defRPr sz="2000" b="0">
+                <a:solidFill>
+                  <a:srgbClr val="333333"/>
+                </a:solidFill>
+                <a:latin typeface="Calibri"/>
+              </a:defRPr>
+            </a:pPr>
+            <a:r>
+              <a:t>• Run spi_uvm and interpret UVM output.</a:t>
+            </a:r>
+          </a:p>
+          <a:p>
+            <a:pPr>
+              <a:lnSpc>
+                <a:spcPts val="2200"/>
+              </a:lnSpc>
+              <a:spcAft>
+                <a:spcPts val="1000"/>
+              </a:spcAft>
+              <a:defRPr sz="2000" b="0">
+                <a:solidFill>
+                  <a:srgbClr val="333333"/>
+                </a:solidFill>
+                <a:latin typeface="Calibri"/>
+              </a:defRPr>
+            </a:pPr>
+            <a:r>
+              <a:t>• Ready for Module 7: I²C protocol + RTL + basic</a:t>
+            </a:r>
+          </a:p>
+          <a:p>
+            <a:pPr>
+              <a:lnSpc>
+                <a:spcPts val="2200"/>
+              </a:lnSpc>
+              <a:spcAft>
+                <a:spcPts val="1000"/>
+              </a:spcAft>
+              <a:defRPr sz="2000" b="0">
+                <a:solidFill>
+                  <a:srgbClr val="333333"/>
+                </a:solidFill>
+                <a:latin typeface="Calibri"/>
+              </a:defRPr>
+            </a:pPr>
+            <a:r>
+              <a:t>      testbench.</a:t>
+            </a:r>
+          </a:p>
+        </p:txBody>
+      </p:sp>
+      <p:sp>
+        <p:nvSpPr>
+          <p:cNvPr id="4" name="TextBox 3"/>
+          <p:cNvSpPr txBox="1"/>
+          <p:nvPr/>
+        </p:nvSpPr>
+        <p:spPr>
+          <a:xfrm>
+            <a:off x="548640" y="6355080"/>
+            <a:ext cx="11064240" cy="320040"/>
+          </a:xfrm>
+          <a:prstGeom prst="rect">
+            <a:avLst/>
+          </a:prstGeom>
+          <a:noFill/>
+        </p:spPr>
+        <p:txBody>
+          <a:bodyPr wrap="square">
+            <a:noAutofit/>
+          </a:bodyPr>
+          <a:lstStyle/>
+          <a:p>
+            <a:pPr algn="r">
+              <a:lnSpc>
+                <a:spcPts val="2200"/>
+              </a:lnSpc>
+              <a:defRPr sz="1000" b="0">
+                <a:solidFill>
+                  <a:srgbClr val="666666"/>
+                </a:solidFill>
+                <a:latin typeface="Calibri"/>
+              </a:defRPr>
+            </a:pPr>
+            <a:r>
+              <a:t>learn_uart_spi_i2c / Module 6</a:t>
+            </a:r>
+          </a:p>
+        </p:txBody>
+      </p:sp>
+    </p:spTree>
+  </p:cSld>
+  <p:clrMapOvr>
+    <a:masterClrMapping/>
+  </p:clrMapOvr>
+</p:sld>
+</file>
+
+<file path=ppt/slides/slide29.xml><?xml version="1.0" encoding="utf-8"?>
+<p:sld xmlns:a="http://schemas.openxmlformats.org/drawingml/2006/main" xmlns:p="http://schemas.openxmlformats.org/presentationml/2006/main" xmlns:r="http://schemas.openxmlformats.org/officeDocument/2006/relationships">
+  <p:cSld>
+    <p:spTree>
+      <p:nvGrpSpPr>
+        <p:cNvPr id="1" name=""/>
+        <p:cNvGrpSpPr/>
+        <p:nvPr/>
+      </p:nvGrpSpPr>
+      <p:grpSpPr/>
+      <p:sp>
+        <p:nvSpPr>
+          <p:cNvPr id="2" name="TextBox 1"/>
+          <p:cNvSpPr txBox="1"/>
+          <p:nvPr/>
+        </p:nvSpPr>
+        <p:spPr>
+          <a:xfrm>
+            <a:off x="548640" y="411480"/>
+            <a:ext cx="11064240" cy="777240"/>
+          </a:xfrm>
+          <a:prstGeom prst="rect">
+            <a:avLst/>
+          </a:prstGeom>
+          <a:noFill/>
+        </p:spPr>
+        <p:txBody>
+          <a:bodyPr wrap="square">
+            <a:noAutofit/>
+          </a:bodyPr>
+          <a:lstStyle/>
+          <a:p>
+            <a:pPr>
+              <a:lnSpc>
+                <a:spcPts val="2200"/>
+              </a:lnSpc>
+              <a:defRPr sz="2800" b="1">
+                <a:solidFill>
+                  <a:srgbClr val="1A1A2E"/>
+                </a:solidFill>
+                <a:latin typeface="Calibri"/>
+              </a:defRPr>
+            </a:pPr>
+            <a:r>
+              <a:t>Exercises</a:t>
+            </a:r>
+          </a:p>
+        </p:txBody>
+      </p:sp>
+      <p:sp>
+        <p:nvSpPr>
+          <p:cNvPr id="3" name="TextBox 2"/>
+          <p:cNvSpPr txBox="1"/>
+          <p:nvPr/>
+        </p:nvSpPr>
+        <p:spPr>
+          <a:xfrm>
+            <a:off x="548640" y="1234440"/>
+            <a:ext cx="11064240" cy="4937760"/>
+          </a:xfrm>
+          <a:prstGeom prst="rect">
+            <a:avLst/>
+          </a:prstGeom>
+          <a:noFill/>
+        </p:spPr>
+        <p:txBody>
+          <a:bodyPr wrap="square">
+            <a:noAutofit/>
+          </a:bodyPr>
+          <a:lstStyle/>
+          <a:p>
+            <a:pPr>
+              <a:lnSpc>
+                <a:spcPts val="2200"/>
+              </a:lnSpc>
+              <a:spcAft>
+                <a:spcPts val="1000"/>
+              </a:spcAft>
+              <a:defRPr sz="2000" b="0">
+                <a:solidFill>
+                  <a:srgbClr val="333333"/>
+                </a:solidFill>
+                <a:latin typeface="Calibri"/>
+              </a:defRPr>
+            </a:pPr>
+            <a:r>
+              <a:t>• Run spi_uvm</a:t>
+            </a:r>
+          </a:p>
+          <a:p>
+            <a:pPr>
+              <a:lnSpc>
+                <a:spcPts val="2200"/>
+              </a:lnSpc>
+              <a:spcAft>
+                <a:spcPts val="1000"/>
+              </a:spcAft>
+              <a:defRPr sz="2000" b="0">
+                <a:solidFill>
+                  <a:srgbClr val="333333"/>
+                </a:solidFill>
+                <a:latin typeface="Calibri"/>
+              </a:defRPr>
+            </a:pPr>
+            <a:r>
+              <a:t>• Trace one transaction</a:t>
+            </a:r>
+          </a:p>
+          <a:p>
+            <a:pPr>
+              <a:lnSpc>
+                <a:spcPts val="2200"/>
+              </a:lnSpc>
+              <a:spcAft>
+                <a:spcPts val="1000"/>
+              </a:spcAft>
+              <a:defRPr sz="2000" b="0">
+                <a:solidFill>
+                  <a:srgbClr val="333333"/>
+                </a:solidFill>
+                <a:latin typeface="Calibri"/>
+              </a:defRPr>
+            </a:pPr>
+            <a:r>
+              <a:t>• Change the sequence</a:t>
+            </a:r>
+          </a:p>
+          <a:p>
+            <a:pPr>
+              <a:lnSpc>
+                <a:spcPts val="2200"/>
+              </a:lnSpc>
+              <a:spcAft>
+                <a:spcPts val="1000"/>
+              </a:spcAft>
+              <a:defRPr sz="2000" b="0">
+                <a:solidFill>
+                  <a:srgbClr val="333333"/>
+                </a:solidFill>
+                <a:latin typeface="Calibri"/>
+              </a:defRPr>
+            </a:pPr>
+            <a:r>
+              <a:t>• Optional: Compare to UART UVM</a:t>
+            </a:r>
+          </a:p>
+        </p:txBody>
+      </p:sp>
+      <p:sp>
+        <p:nvSpPr>
+          <p:cNvPr id="4" name="TextBox 3"/>
+          <p:cNvSpPr txBox="1"/>
+          <p:nvPr/>
+        </p:nvSpPr>
+        <p:spPr>
+          <a:xfrm>
+            <a:off x="548640" y="6355080"/>
+            <a:ext cx="11064240" cy="320040"/>
+          </a:xfrm>
+          <a:prstGeom prst="rect">
+            <a:avLst/>
+          </a:prstGeom>
+          <a:noFill/>
+        </p:spPr>
+        <p:txBody>
+          <a:bodyPr wrap="square">
+            <a:noAutofit/>
+          </a:bodyPr>
+          <a:lstStyle/>
+          <a:p>
+            <a:pPr algn="r">
+              <a:lnSpc>
+                <a:spcPts val="2200"/>
+              </a:lnSpc>
+              <a:defRPr sz="1000" b="0">
+                <a:solidFill>
+                  <a:srgbClr val="666666"/>
+                </a:solidFill>
+                <a:latin typeface="Calibri"/>
+              </a:defRPr>
+            </a:pPr>
+            <a:r>
+              <a:t>learn_uart_spi_i2c / Module 6</a:t>
+            </a:r>
+          </a:p>
+        </p:txBody>
+      </p:sp>
+    </p:spTree>
+  </p:cSld>
+  <p:clrMapOvr>
+    <a:masterClrMapping/>
+  </p:clrMapOvr>
+</p:sld>
+</file>
+
 <file path=ppt/slides/slide3.xml><?xml version="1.0" encoding="utf-8"?>
 <p:sld xmlns:a="http://schemas.openxmlformats.org/drawingml/2006/main" xmlns:p="http://schemas.openxmlformats.org/presentationml/2006/main" xmlns:r="http://schemas.openxmlformats.org/officeDocument/2006/relationships">
   <p:cSld>
@@ -5735,6 +8026,434 @@
             </a:pPr>
             <a:r>
               <a:t>      vendored UVM).</a:t>
+            </a:r>
+          </a:p>
+        </p:txBody>
+      </p:sp>
+      <p:sp>
+        <p:nvSpPr>
+          <p:cNvPr id="4" name="TextBox 3"/>
+          <p:cNvSpPr txBox="1"/>
+          <p:nvPr/>
+        </p:nvSpPr>
+        <p:spPr>
+          <a:xfrm>
+            <a:off x="548640" y="6355080"/>
+            <a:ext cx="11064240" cy="320040"/>
+          </a:xfrm>
+          <a:prstGeom prst="rect">
+            <a:avLst/>
+          </a:prstGeom>
+          <a:noFill/>
+        </p:spPr>
+        <p:txBody>
+          <a:bodyPr wrap="square">
+            <a:noAutofit/>
+          </a:bodyPr>
+          <a:lstStyle/>
+          <a:p>
+            <a:pPr algn="r">
+              <a:lnSpc>
+                <a:spcPts val="2200"/>
+              </a:lnSpc>
+              <a:defRPr sz="1000" b="0">
+                <a:solidFill>
+                  <a:srgbClr val="666666"/>
+                </a:solidFill>
+                <a:latin typeface="Calibri"/>
+              </a:defRPr>
+            </a:pPr>
+            <a:r>
+              <a:t>learn_uart_spi_i2c / Module 6</a:t>
+            </a:r>
+          </a:p>
+        </p:txBody>
+      </p:sp>
+    </p:spTree>
+  </p:cSld>
+  <p:clrMapOvr>
+    <a:masterClrMapping/>
+  </p:clrMapOvr>
+</p:sld>
+</file>
+
+<file path=ppt/slides/slide30.xml><?xml version="1.0" encoding="utf-8"?>
+<p:sld xmlns:a="http://schemas.openxmlformats.org/drawingml/2006/main" xmlns:p="http://schemas.openxmlformats.org/presentationml/2006/main" xmlns:r="http://schemas.openxmlformats.org/officeDocument/2006/relationships">
+  <p:cSld>
+    <p:spTree>
+      <p:nvGrpSpPr>
+        <p:cNvPr id="1" name=""/>
+        <p:cNvGrpSpPr/>
+        <p:nvPr/>
+      </p:nvGrpSpPr>
+      <p:grpSpPr/>
+      <p:sp>
+        <p:nvSpPr>
+          <p:cNvPr id="2" name="TextBox 1"/>
+          <p:cNvSpPr txBox="1"/>
+          <p:nvPr/>
+        </p:nvSpPr>
+        <p:spPr>
+          <a:xfrm>
+            <a:off x="548640" y="411480"/>
+            <a:ext cx="11064240" cy="777240"/>
+          </a:xfrm>
+          <a:prstGeom prst="rect">
+            <a:avLst/>
+          </a:prstGeom>
+          <a:noFill/>
+        </p:spPr>
+        <p:txBody>
+          <a:bodyPr wrap="square">
+            <a:noAutofit/>
+          </a:bodyPr>
+          <a:lstStyle/>
+          <a:p>
+            <a:pPr>
+              <a:lnSpc>
+                <a:spcPts val="2200"/>
+              </a:lnSpc>
+              <a:defRPr sz="2800" b="1">
+                <a:solidFill>
+                  <a:srgbClr val="1A1A2E"/>
+                </a:solidFill>
+                <a:latin typeface="Calibri"/>
+              </a:defRPr>
+            </a:pPr>
+            <a:r>
+              <a:t>Assessment checklist</a:t>
+            </a:r>
+          </a:p>
+        </p:txBody>
+      </p:sp>
+      <p:sp>
+        <p:nvSpPr>
+          <p:cNvPr id="3" name="TextBox 2"/>
+          <p:cNvSpPr txBox="1"/>
+          <p:nvPr/>
+        </p:nvSpPr>
+        <p:spPr>
+          <a:xfrm>
+            <a:off x="548640" y="1234440"/>
+            <a:ext cx="11064240" cy="4937760"/>
+          </a:xfrm>
+          <a:prstGeom prst="rect">
+            <a:avLst/>
+          </a:prstGeom>
+          <a:noFill/>
+        </p:spPr>
+        <p:txBody>
+          <a:bodyPr wrap="square">
+            <a:noAutofit/>
+          </a:bodyPr>
+          <a:lstStyle/>
+          <a:p>
+            <a:pPr>
+              <a:lnSpc>
+                <a:spcPts val="2200"/>
+              </a:lnSpc>
+              <a:spcAft>
+                <a:spcPts val="1000"/>
+              </a:spcAft>
+              <a:defRPr sz="2000" b="0">
+                <a:solidFill>
+                  <a:srgbClr val="333333"/>
+                </a:solidFill>
+                <a:latin typeface="Calibri"/>
+              </a:defRPr>
+            </a:pPr>
+            <a:r>
+              <a:t>• Can describe the SPI UVM agent and how it maps to</a:t>
+            </a:r>
+          </a:p>
+          <a:p>
+            <a:pPr>
+              <a:lnSpc>
+                <a:spcPts val="2200"/>
+              </a:lnSpc>
+              <a:spcAft>
+                <a:spcPts val="1000"/>
+              </a:spcAft>
+              <a:defRPr sz="2000" b="0">
+                <a:solidFill>
+                  <a:srgbClr val="333333"/>
+                </a:solidFill>
+                <a:latin typeface="Calibri"/>
+              </a:defRPr>
+            </a:pPr>
+            <a:r>
+              <a:t>      SPI (one byte, mode 0 monitoring).</a:t>
+            </a:r>
+          </a:p>
+          <a:p>
+            <a:pPr>
+              <a:lnSpc>
+                <a:spcPts val="2200"/>
+              </a:lnSpc>
+              <a:spcAft>
+                <a:spcPts val="1000"/>
+              </a:spcAft>
+              <a:defRPr sz="2000" b="0">
+                <a:solidFill>
+                  <a:srgbClr val="333333"/>
+                </a:solidFill>
+                <a:latin typeface="Calibri"/>
+              </a:defRPr>
+            </a:pPr>
+            <a:r>
+              <a:t>• Can run spi_uvm and interpret UVM output.</a:t>
+            </a:r>
+          </a:p>
+          <a:p>
+            <a:pPr>
+              <a:lnSpc>
+                <a:spcPts val="2200"/>
+              </a:lnSpc>
+              <a:spcAft>
+                <a:spcPts val="1000"/>
+              </a:spcAft>
+              <a:defRPr sz="2000" b="0">
+                <a:solidFill>
+                  <a:srgbClr val="333333"/>
+                </a:solidFill>
+                <a:latin typeface="Calibri"/>
+              </a:defRPr>
+            </a:pPr>
+            <a:r>
+              <a:t>• Ready for Module 7: I²C protocol + RTL + basic</a:t>
+            </a:r>
+          </a:p>
+          <a:p>
+            <a:pPr>
+              <a:lnSpc>
+                <a:spcPts val="2200"/>
+              </a:lnSpc>
+              <a:spcAft>
+                <a:spcPts val="1000"/>
+              </a:spcAft>
+              <a:defRPr sz="2000" b="0">
+                <a:solidFill>
+                  <a:srgbClr val="333333"/>
+                </a:solidFill>
+                <a:latin typeface="Calibri"/>
+              </a:defRPr>
+            </a:pPr>
+            <a:r>
+              <a:t>      testbench.</a:t>
+            </a:r>
+          </a:p>
+        </p:txBody>
+      </p:sp>
+      <p:sp>
+        <p:nvSpPr>
+          <p:cNvPr id="4" name="TextBox 3"/>
+          <p:cNvSpPr txBox="1"/>
+          <p:nvPr/>
+        </p:nvSpPr>
+        <p:spPr>
+          <a:xfrm>
+            <a:off x="548640" y="6355080"/>
+            <a:ext cx="11064240" cy="320040"/>
+          </a:xfrm>
+          <a:prstGeom prst="rect">
+            <a:avLst/>
+          </a:prstGeom>
+          <a:noFill/>
+        </p:spPr>
+        <p:txBody>
+          <a:bodyPr wrap="square">
+            <a:noAutofit/>
+          </a:bodyPr>
+          <a:lstStyle/>
+          <a:p>
+            <a:pPr algn="r">
+              <a:lnSpc>
+                <a:spcPts val="2200"/>
+              </a:lnSpc>
+              <a:defRPr sz="1000" b="0">
+                <a:solidFill>
+                  <a:srgbClr val="666666"/>
+                </a:solidFill>
+                <a:latin typeface="Calibri"/>
+              </a:defRPr>
+            </a:pPr>
+            <a:r>
+              <a:t>learn_uart_spi_i2c / Module 6</a:t>
+            </a:r>
+          </a:p>
+        </p:txBody>
+      </p:sp>
+    </p:spTree>
+  </p:cSld>
+  <p:clrMapOvr>
+    <a:masterClrMapping/>
+  </p:clrMapOvr>
+</p:sld>
+</file>
+
+<file path=ppt/slides/slide31.xml><?xml version="1.0" encoding="utf-8"?>
+<p:sld xmlns:a="http://schemas.openxmlformats.org/drawingml/2006/main" xmlns:p="http://schemas.openxmlformats.org/presentationml/2006/main" xmlns:r="http://schemas.openxmlformats.org/officeDocument/2006/relationships">
+  <p:cSld>
+    <p:spTree>
+      <p:nvGrpSpPr>
+        <p:cNvPr id="1" name=""/>
+        <p:cNvGrpSpPr/>
+        <p:nvPr/>
+      </p:nvGrpSpPr>
+      <p:grpSpPr/>
+      <p:sp>
+        <p:nvSpPr>
+          <p:cNvPr id="2" name="TextBox 1"/>
+          <p:cNvSpPr txBox="1"/>
+          <p:nvPr/>
+        </p:nvSpPr>
+        <p:spPr>
+          <a:xfrm>
+            <a:off x="548640" y="411480"/>
+            <a:ext cx="11064240" cy="777240"/>
+          </a:xfrm>
+          <a:prstGeom prst="rect">
+            <a:avLst/>
+          </a:prstGeom>
+          <a:noFill/>
+        </p:spPr>
+        <p:txBody>
+          <a:bodyPr wrap="square">
+            <a:noAutofit/>
+          </a:bodyPr>
+          <a:lstStyle/>
+          <a:p>
+            <a:pPr>
+              <a:lnSpc>
+                <a:spcPts val="2200"/>
+              </a:lnSpc>
+              <a:defRPr sz="2800" b="1">
+                <a:solidFill>
+                  <a:srgbClr val="1A1A2E"/>
+                </a:solidFill>
+                <a:latin typeface="Calibri"/>
+              </a:defRPr>
+            </a:pPr>
+            <a:r>
+              <a:t>Summary &amp; next steps</a:t>
+            </a:r>
+          </a:p>
+        </p:txBody>
+      </p:sp>
+      <p:sp>
+        <p:nvSpPr>
+          <p:cNvPr id="3" name="TextBox 2"/>
+          <p:cNvSpPr txBox="1"/>
+          <p:nvPr/>
+        </p:nvSpPr>
+        <p:spPr>
+          <a:xfrm>
+            <a:off x="548640" y="1234440"/>
+            <a:ext cx="11064240" cy="4937760"/>
+          </a:xfrm>
+          <a:prstGeom prst="rect">
+            <a:avLst/>
+          </a:prstGeom>
+          <a:noFill/>
+        </p:spPr>
+        <p:txBody>
+          <a:bodyPr wrap="square">
+            <a:noAutofit/>
+          </a:bodyPr>
+          <a:lstStyle/>
+          <a:p>
+            <a:pPr>
+              <a:lnSpc>
+                <a:spcPts val="2200"/>
+              </a:lnSpc>
+              <a:spcAft>
+                <a:spcPts val="1000"/>
+              </a:spcAft>
+              <a:defRPr sz="2000" b="0">
+                <a:solidFill>
+                  <a:srgbClr val="333333"/>
+                </a:solidFill>
+                <a:latin typeface="Calibri"/>
+              </a:defRPr>
+            </a:pPr>
+            <a:r>
+              <a:t>• Extend SPI verification to **UVM+SV** — SPI agent</a:t>
+            </a:r>
+          </a:p>
+          <a:p>
+            <a:pPr>
+              <a:lnSpc>
+                <a:spcPts val="2200"/>
+              </a:lnSpc>
+              <a:spcAft>
+                <a:spcPts val="1000"/>
+              </a:spcAft>
+              <a:defRPr sz="2000" b="0">
+                <a:solidFill>
+                  <a:srgbClr val="333333"/>
+                </a:solidFill>
+                <a:latin typeface="Calibri"/>
+              </a:defRPr>
+            </a:pPr>
+            <a:r>
+              <a:t>      (transaction, sequence, driver, monitor, scoreboa…</a:t>
+            </a:r>
+          </a:p>
+          <a:p>
+            <a:pPr>
+              <a:lnSpc>
+                <a:spcPts val="2200"/>
+              </a:lnSpc>
+              <a:spcAft>
+                <a:spcPts val="1000"/>
+              </a:spcAft>
+              <a:defRPr sz="2000" b="0">
+                <a:solidFill>
+                  <a:srgbClr val="333333"/>
+                </a:solidFill>
+                <a:latin typeface="Calibri"/>
+              </a:defRPr>
+            </a:pPr>
+            <a:r>
+              <a:t>• Complete module6/CHECKLIST.md</a:t>
+            </a:r>
+          </a:p>
+          <a:p>
+            <a:pPr>
+              <a:lnSpc>
+                <a:spcPts val="2200"/>
+              </a:lnSpc>
+              <a:spcAft>
+                <a:spcPts val="1000"/>
+              </a:spcAft>
+              <a:defRPr sz="2000" b="0">
+                <a:solidFill>
+                  <a:srgbClr val="333333"/>
+                </a:solidFill>
+                <a:latin typeface="Calibri"/>
+              </a:defRPr>
+            </a:pPr>
+            <a:r>
+              <a:t>• Review module6/EXAMPLES.md and run each lab</a:t>
+            </a:r>
+          </a:p>
+          <a:p>
+            <a:pPr>
+              <a:lnSpc>
+                <a:spcPts val="2200"/>
+              </a:lnSpc>
+              <a:spcAft>
+                <a:spcPts val="1000"/>
+              </a:spcAft>
+              <a:defRPr sz="2000" b="0">
+                <a:solidFill>
+                  <a:srgbClr val="333333"/>
+                </a:solidFill>
+                <a:latin typeface="Calibri"/>
+              </a:defRPr>
+            </a:pPr>
+            <a:r>
+              <a:t>• Next: I²C</a:t>
             </a:r>
           </a:p>
         </p:txBody>
@@ -6146,7 +8865,7 @@
               </a:defRPr>
             </a:pPr>
             <a:r>
-              <a:t>Syllabus topics</a:t>
+              <a:t>How to learn this module</a:t>
             </a:r>
           </a:p>
         </p:txBody>
@@ -6242,7 +8961,7 @@
               </a:defRPr>
             </a:pPr>
             <a:r>
-              <a:t>1. SPI UVM Agent</a:t>
+              <a:t>Suggested learning path</a:t>
             </a:r>
           </a:p>
         </p:txBody>
@@ -6284,7 +9003,7 @@
               </a:defRPr>
             </a:pPr>
             <a:r>
-              <a:t>• Transaction (SpiTransaction): byte to send (data);</a:t>
+              <a:t>• Read the detailed SPI learning guide:</a:t>
             </a:r>
           </a:p>
           <a:p>
@@ -6303,7 +9022,7 @@
               </a:defRPr>
             </a:pPr>
             <a:r>
-              <a:t>      monitor fills observed_mosi (reconstructed from…</a:t>
+              <a:t>      SPI_LEARNING_GUIDE.md — what SPI is, how it works</a:t>
             </a:r>
           </a:p>
           <a:p>
@@ -6322,7 +9041,7 @@
               </a:defRPr>
             </a:pPr>
             <a:r>
-              <a:t>• Sequence (SpiSequence): produces directed</a:t>
+              <a:t>      (signals, M…</a:t>
             </a:r>
           </a:p>
           <a:p>
@@ -6341,7 +9060,7 @@
               </a:defRPr>
             </a:pPr>
             <a:r>
-              <a:t>      transactions (0x00, 0x01, 0x55, 0xAA, 0xFF).</a:t>
+              <a:t>• Read the protocols + UVM overview:</a:t>
             </a:r>
           </a:p>
           <a:p>
@@ -6360,7 +9079,7 @@
               </a:defRPr>
             </a:pPr>
             <a:r>
-              <a:t>• Driver (SpiDriver): gets transaction, drives start</a:t>
+              <a:t>      LEARNING_GUIDE_PROTOCOLS_AND_UVM.md — Part B § 5.</a:t>
             </a:r>
           </a:p>
           <a:p>
@@ -6379,83 +9098,7 @@
               </a:defRPr>
             </a:pPr>
             <a:r>
-              <a:t>      and data_in for one cycle, waits for done.</a:t>
-            </a:r>
-          </a:p>
-          <a:p>
-            <a:pPr>
-              <a:lnSpc>
-                <a:spcPts val="2200"/>
-              </a:lnSpc>
-              <a:spcAft>
-                <a:spcPts val="1000"/>
-              </a:spcAft>
-              <a:defRPr sz="2000" b="0">
-                <a:solidFill>
-                  <a:srgbClr val="333333"/>
-                </a:solidFill>
-                <a:latin typeface="Calibri"/>
-              </a:defRPr>
-            </a:pPr>
-            <a:r>
-              <a:t>• Monitor (SpiMonitor): watches cs_n; when cs_n goes</a:t>
-            </a:r>
-          </a:p>
-          <a:p>
-            <a:pPr>
-              <a:lnSpc>
-                <a:spcPts val="2200"/>
-              </a:lnSpc>
-              <a:spcAft>
-                <a:spcPts val="1000"/>
-              </a:spcAft>
-              <a:defRPr sz="2000" b="0">
-                <a:solidFill>
-                  <a:srgbClr val="333333"/>
-                </a:solidFill>
-                <a:latin typeface="Calibri"/>
-              </a:defRPr>
-            </a:pPr>
-            <a:r>
-              <a:t>      low, samples MOSI on each rising edge of SCLK (m…</a:t>
-            </a:r>
-          </a:p>
-          <a:p>
-            <a:pPr>
-              <a:lnSpc>
-                <a:spcPts val="2200"/>
-              </a:lnSpc>
-              <a:spcAft>
-                <a:spcPts val="1000"/>
-              </a:spcAft>
-              <a:defRPr sz="2000" b="0">
-                <a:solidFill>
-                  <a:srgbClr val="333333"/>
-                </a:solidFill>
-                <a:latin typeface="Calibri"/>
-              </a:defRPr>
-            </a:pPr>
-            <a:r>
-              <a:t>• Scoreboard (SpiScoreboard): compares expected (from</a:t>
-            </a:r>
-          </a:p>
-          <a:p>
-            <a:pPr>
-              <a:lnSpc>
-                <a:spcPts val="2200"/>
-              </a:lnSpc>
-              <a:spcAft>
-                <a:spcPts val="1000"/>
-              </a:spcAft>
-              <a:defRPr sz="2000" b="0">
-                <a:solidFill>
-                  <a:srgbClr val="333333"/>
-                </a:solidFill>
-                <a:latin typeface="Calibri"/>
-              </a:defRPr>
-            </a:pPr>
-            <a:r>
-              <a:t>      test) vs observed_mosi (from monitor).</a:t>
+              <a:t>      How UVM Maps t…</a:t>
             </a:r>
           </a:p>
         </p:txBody>
@@ -6525,8 +9168,8 @@
         </p:nvSpPr>
         <p:spPr>
           <a:xfrm>
-            <a:off x="548640" y="411480"/>
-            <a:ext cx="11064240" cy="777240"/>
+            <a:off x="548640" y="2743200"/>
+            <a:ext cx="11064240" cy="1371600"/>
           </a:xfrm>
           <a:prstGeom prst="rect">
             <a:avLst/>
@@ -6539,11 +9182,11 @@
           </a:bodyPr>
           <a:lstStyle/>
           <a:p>
-            <a:pPr>
-              <a:lnSpc>
-                <a:spcPts val="2200"/>
-              </a:lnSpc>
-              <a:defRPr sz="2800" b="1">
+            <a:pPr algn="ctr">
+              <a:lnSpc>
+                <a:spcPts val="2200"/>
+              </a:lnSpc>
+              <a:defRPr sz="3600" b="1">
                 <a:solidFill>
                   <a:srgbClr val="1A1A2E"/>
                 </a:solidFill>
@@ -6551,7 +9194,7 @@
               </a:defRPr>
             </a:pPr>
             <a:r>
-              <a:t>2. Mode 0 Timing</a:t>
+              <a:t>Design architecture</a:t>
             </a:r>
           </a:p>
         </p:txBody>
@@ -6559,105 +9202,6 @@
       <p:sp>
         <p:nvSpPr>
           <p:cNvPr id="3" name="TextBox 2"/>
-          <p:cNvSpPr txBox="1"/>
-          <p:nvPr/>
-        </p:nvSpPr>
-        <p:spPr>
-          <a:xfrm>
-            <a:off x="548640" y="1234440"/>
-            <a:ext cx="11064240" cy="4937760"/>
-          </a:xfrm>
-          <a:prstGeom prst="rect">
-            <a:avLst/>
-          </a:prstGeom>
-          <a:noFill/>
-        </p:spPr>
-        <p:txBody>
-          <a:bodyPr wrap="square">
-            <a:noAutofit/>
-          </a:bodyPr>
-          <a:lstStyle/>
-          <a:p>
-            <a:pPr>
-              <a:lnSpc>
-                <a:spcPts val="2200"/>
-              </a:lnSpc>
-              <a:spcAft>
-                <a:spcPts val="1000"/>
-              </a:spcAft>
-              <a:defRPr sz="2000" b="0">
-                <a:solidFill>
-                  <a:srgbClr val="333333"/>
-                </a:solidFill>
-                <a:latin typeface="Calibri"/>
-              </a:defRPr>
-            </a:pPr>
-            <a:r>
-              <a:t>• SPI mode 0: SCLK idles low; data captured on rising</a:t>
-            </a:r>
-          </a:p>
-          <a:p>
-            <a:pPr>
-              <a:lnSpc>
-                <a:spcPts val="2200"/>
-              </a:lnSpc>
-              <a:spcAft>
-                <a:spcPts val="1000"/>
-              </a:spcAft>
-              <a:defRPr sz="2000" b="0">
-                <a:solidFill>
-                  <a:srgbClr val="333333"/>
-                </a:solidFill>
-                <a:latin typeface="Calibri"/>
-              </a:defRPr>
-            </a:pPr>
-            <a:r>
-              <a:t>      edge; data changed on falling edge.</a:t>
-            </a:r>
-          </a:p>
-          <a:p>
-            <a:pPr>
-              <a:lnSpc>
-                <a:spcPts val="2200"/>
-              </a:lnSpc>
-              <a:spcAft>
-                <a:spcPts val="1000"/>
-              </a:spcAft>
-              <a:defRPr sz="2000" b="0">
-                <a:solidFill>
-                  <a:srgbClr val="333333"/>
-                </a:solidFill>
-                <a:latin typeface="Calibri"/>
-              </a:defRPr>
-            </a:pPr>
-            <a:r>
-              <a:t>• Monitor: Waits for cs_n low, then on 8 rising edges</a:t>
-            </a:r>
-          </a:p>
-          <a:p>
-            <a:pPr>
-              <a:lnSpc>
-                <a:spcPts val="2200"/>
-              </a:lnSpc>
-              <a:spcAft>
-                <a:spcPts val="1000"/>
-              </a:spcAft>
-              <a:defRPr sz="2000" b="0">
-                <a:solidFill>
-                  <a:srgbClr val="333333"/>
-                </a:solidFill>
-                <a:latin typeface="Calibri"/>
-              </a:defRPr>
-            </a:pPr>
-            <a:r>
-              <a:t>      of SCLK captures MOSI into bits [7:0] (MSB firs…</a:t>
-            </a:r>
-          </a:p>
-        </p:txBody>
-      </p:sp>
-      <p:sp>
-        <p:nvSpPr>
-          <p:cNvPr id="4" name="TextBox 3"/>
           <p:cNvSpPr txBox="1"/>
           <p:nvPr/>
         </p:nvSpPr>
@@ -6746,21 +9290,45 @@
               </a:defRPr>
             </a:pPr>
             <a:r>
-              <a:t>3. Toolchain</a:t>
-            </a:r>
-          </a:p>
-        </p:txBody>
-      </p:sp>
-      <p:sp>
-        <p:nvSpPr>
-          <p:cNvPr id="3" name="TextBox 2"/>
+              <a:t>RTL / block architecture</a:t>
+            </a:r>
+          </a:p>
+        </p:txBody>
+      </p:sp>
+      <p:pic>
+        <p:nvPicPr>
+          <p:cNvPr id="3" name="Picture 2" descr="rtl_architecture.png"/>
+          <p:cNvPicPr>
+            <a:picLocks noChangeAspect="1"/>
+          </p:cNvPicPr>
+          <p:nvPr/>
+        </p:nvPicPr>
+        <p:blipFill>
+          <a:blip r:embed="rId2"/>
+          <a:stretch>
+            <a:fillRect/>
+          </a:stretch>
+        </p:blipFill>
+        <p:spPr>
+          <a:xfrm>
+            <a:off x="548640" y="1143000"/>
+            <a:ext cx="8128000" cy="4572000"/>
+          </a:xfrm>
+          <a:prstGeom prst="rect">
+            <a:avLst/>
+          </a:prstGeom>
+        </p:spPr>
+      </p:pic>
+      <p:sp>
+        <p:nvSpPr>
+          <p:cNvPr id="4" name="TextBox 3"/>
           <p:cNvSpPr txBox="1"/>
           <p:nvPr/>
         </p:nvSpPr>
         <p:spPr>
           <a:xfrm>
-            <a:off x="548640" y="1234440"/>
-            <a:ext cx="11064240" cy="4937760"/>
+            <a:off x="548640" y="5897880"/>
+            <a:ext cx="11064240" cy="411480"/>
           </a:xfrm>
           <a:prstGeom prst="rect">
             <a:avLst/>
@@ -6777,10 +9345,7 @@
               <a:lnSpc>
                 <a:spcPts val="2200"/>
               </a:lnSpc>
-              <a:spcAft>
-                <a:spcPts val="1000"/>
-              </a:spcAft>
-              <a:defRPr sz="2000" b="0">
+              <a:defRPr sz="1200" b="0">
                 <a:solidFill>
                   <a:srgbClr val="333333"/>
                 </a:solidFill>
@@ -6788,33 +9353,14 @@
               </a:defRPr>
             </a:pPr>
             <a:r>
-              <a:t>• Same as Module 2: Verilator with -sv, --timing,</a:t>
-            </a:r>
-          </a:p>
-          <a:p>
-            <a:pPr>
-              <a:lnSpc>
-                <a:spcPts val="2200"/>
-              </a:lnSpc>
-              <a:spcAft>
-                <a:spcPts val="1000"/>
-              </a:spcAft>
-              <a:defRPr sz="2000" b="0">
-                <a:solidFill>
-                  <a:srgbClr val="333333"/>
-                </a:solidFill>
-                <a:latin typeface="Calibri"/>
-              </a:defRPr>
-            </a:pPr>
-            <a:r>
-              <a:t>      --trace, UVM include paths, make SIM=verilator TEST…</a:t>
-            </a:r>
-          </a:p>
-        </p:txBody>
-      </p:sp>
-      <p:sp>
-        <p:nvSpPr>
-          <p:cNvPr id="4" name="TextBox 3"/>
+              <a:t>Module 6: DUT / block hierarchy (see module6/examples/).</a:t>
+            </a:r>
+          </a:p>
+        </p:txBody>
+      </p:sp>
+      <p:sp>
+        <p:nvSpPr>
+          <p:cNvPr id="5" name="TextBox 4"/>
           <p:cNvSpPr txBox="1"/>
           <p:nvPr/>
         </p:nvSpPr>
